--- a/it/slides/14-Architettura_dei_Calcolatori-Registri_e_Bus.pptx
+++ b/it/slides/14-Architettura_dei_Calcolatori-Registri_e_Bus.pptx
@@ -126,19 +126,19 @@
   <p:extLst>
     <p:ext uri="{521415D9-36F7-43E2-AB2F-B90AF26B5E84}">
       <p14:sectionLst xmlns:p14="http://schemas.microsoft.com/office/powerpoint/2010/main">
-        <p14:section name="Apertura" id="{736aeee4-997c-6d4c-4a03-f81e21fcfe5a}">
+        <p14:section name="Apertura" id="{402ec39d-e658-ea79-42e2-a3acba421836}">
           <p14:sldIdLst>
             <p14:sldId id="256"/>
             <p14:sldId id="257"/>
           </p14:sldIdLst>
         </p14:section>
-        <p14:section name="Porte di parola e registri" id="{3c8f2110-e6c6-de1e-0e58-012d52d8f7d2}">
+        <p14:section name="Porte di parola e registri" id="{31f9f3e6-083e-2277-1c5d-00a282895b38}">
           <p14:sldIdLst>
             <p14:sldId id="258"/>
             <p14:sldId id="259"/>
           </p14:sldIdLst>
         </p14:section>
-        <p14:section name="Bus" id="{8bf34aee-1ba0-7439-cb92-15cae7ac0354}">
+        <p14:section name="Bus" id="{5952ab1c-b177-1ada-1871-844f6a2f12e6}">
           <p14:sldIdLst>
             <p14:sldId id="260"/>
             <p14:sldId id="261"/>
@@ -146,14 +146,14 @@
             <p14:sldId id="263"/>
           </p14:sldIdLst>
         </p14:section>
-        <p14:section name="Buffer a tre stati" id="{41ffb027-f86b-40c5-db1a-dec168d1ae72}">
+        <p14:section name="Buffer a tre stati" id="{c473e26f-b8fc-0fef-033c-c5a95ca1b4ef}">
           <p14:sldIdLst>
             <p14:sldId id="264"/>
             <p14:sldId id="265"/>
             <p14:sldId id="266"/>
           </p14:sldIdLst>
         </p14:section>
-        <p14:section name="Registri a scorrimento" id="{6c0c08dc-fd49-ecb0-5ec0-39be2a634466}">
+        <p14:section name="Registri a scorrimento" id="{2f07dfb3-2f08-90b3-2865-b915372c6be8}">
           <p14:sldIdLst>
             <p14:sldId id="267"/>
             <p14:sldId id="268"/>
@@ -162,7 +162,7 @@
             <p14:sldId id="271"/>
           </p14:sldIdLst>
         </p14:section>
-        <p14:section name="Ritorno alla macchina" id="{bf72f5e5-8c4e-2d26-99b6-1f73bcb8bc50}">
+        <p14:section name="Ritorno alla macchina" id="{8981545c-5061-47f4-6ca6-19c196a06fee}">
           <p14:sldIdLst>
             <p14:sldId id="272"/>
             <p14:sldId id="273"/>
@@ -1821,7 +1821,8 @@
             <a:r>
               <a:rPr lang="en-US" dirty="0"/>
               <a:t>Un registro memorizza un gruppo di bit: nella forma più semplice è un gruppo di flip-flop con un clock comune. L'esempio classico in un solo chip è il 74273, con otto flip-flop D, un clock e un clear. Caricare un registro significa memorizzare il dato presente ai suoi ingressi, e accade quando il segnale di caricamento è attivo, di norma in sincronia con il clock. Ciascuno dei registri da x1 a x31 di RISC-V è fatto di trentadue flip-flop di questo tipo.
-Per il docente: Datasheet: ti.com/lit/ds/symlink/sn74ls273.pdf. Il 7474 contiene due flip-flop D con preset e clear. Per il flip-flop si veda la Lezione 13.</a:t>
+Per il docente: Datasheet: ti.com/lit/ds/symlink/sn74ls273.pdf. Il 7474 contiene due flip-flop D con preset e clear. Per il flip-flop si veda la Lezione 13.
+Immagini: Animation Technologies LifeView LR25 - Hitachi LS273-2523.jpg, Raimond Spekking, CC BY-SA 4.0, Wikimedia Commons.</a:t>
             </a:r>
             <a:endParaRPr lang="en-US" dirty="0"/>
           </a:p>
@@ -2088,7 +2089,8 @@
             <a:r>
               <a:rPr lang="en-US" dirty="0"/>
               <a:t>Un trasferimento può essere parallelo, con gli n bit che viaggiano insieme su n linee in un passo, oppure seriale, con i bit che viaggiano uno dopo l'altro su una sola linea in n passi, oppure misto, per esempio un byte alla volta. Ricordate l'ultima riga: dentro un chip i bus sono paralleli; tra chip e tra macchine oggi sono quasi sempre seriali, perché ad altissima velocità è più facile tenere pulita una linea che tenere al passo trentadue linee.
-Per il docente: USB, SATA, PCI Express, HDMI ed Ethernet sono tutti seriali: ad altissima velocità è più facile tenere pulita una linea veloce che tenere al passo trentadue linee.</a:t>
+Per il docente: USB, SATA, PCI Express, HDMI ed Ethernet sono tutti seriali: ad altissima velocità è più facile tenere pulita una linea veloce che tenere al passo trentadue linee.
+Immagini: Hand Etched PCB.png, Tpdwkouaa, CC BY-SA 4.0, Wikimedia Commons.</a:t>
             </a:r>
             <a:endParaRPr lang="en-US" dirty="0"/>
           </a:p>
@@ -3296,7 +3298,63 @@
       </p:sp>
       <p:sp>
         <p:nvSpPr>
-          <p:cNvPr id="12" name="Shape 10"/>
+          <p:cNvPr id="12" name="Text 10"/>
+          <p:cNvSpPr txBox="1"/>
+          <p:nvPr/>
+        </p:nvSpPr>
+        <p:spPr>
+          <a:xfrm>
+            <a:off x="4693615" y="566928"/>
+            <a:ext cx="6949440" cy="640080"/>
+          </a:xfrm>
+          <a:prstGeom prst="rect">
+            <a:avLst/>
+          </a:prstGeom>
+          <a:noFill/>
+          <a:ln/>
+        </p:spPr>
+        <p:txBody>
+          <a:bodyPr wrap="square" lIns="0" tIns="0" rIns="0" bIns="0" rtlCol="0" anchor="t"/>
+          <a:lstStyle/>
+          <a:p>
+            <a:pPr algn="r" indent="0" marL="0">
+              <a:buNone/>
+            </a:pPr>
+            <a:r>
+              <a:rPr lang="en-US" sz="1300" dirty="0">
+                <a:solidFill>
+                  <a:srgbClr val="CFE3EA"/>
+                </a:solidFill>
+                <a:latin typeface="Calibri" pitchFamily="34" charset="0"/>
+                <a:ea typeface="Calibri" pitchFamily="34" charset="-122"/>
+                <a:cs typeface="Calibri" pitchFamily="34" charset="-120"/>
+              </a:rPr>
+              <a:t>Presentazione della lezione. I listati, il programma completo e come provarlo sono nella presentazione del codice:</a:t>
+            </a:r>
+            <a:endParaRPr lang="en-US" sz="1300" dirty="0"/>
+          </a:p>
+          <a:p>
+            <a:pPr algn="r" indent="0" marL="0">
+              <a:buNone/>
+            </a:pPr>
+            <a:r>
+              <a:rPr lang="en-US" sz="1300" dirty="0">
+                <a:solidFill>
+                  <a:srgbClr val="CFE3EA"/>
+                </a:solidFill>
+                <a:latin typeface="Calibri" pitchFamily="34" charset="0"/>
+                <a:ea typeface="Calibri" pitchFamily="34" charset="-122"/>
+                <a:cs typeface="Calibri" pitchFamily="34" charset="-120"/>
+              </a:rPr>
+              <a:t>14-Architettura_dei_Calcolatori-Registri_e_Bus-Codice.pptx</a:t>
+            </a:r>
+            <a:endParaRPr lang="en-US" sz="1300" dirty="0"/>
+          </a:p>
+        </p:txBody>
+      </p:sp>
+      <p:sp>
+        <p:nvSpPr>
+          <p:cNvPr id="13" name="Shape 11"/>
           <p:cNvSpPr/>
           <p:nvPr/>
         </p:nvSpPr>
@@ -3323,7 +3381,7 @@
       </p:sp>
       <p:pic>
         <p:nvPicPr>
-          <p:cNvPr id="13" name="Image 0" descr="/Users/raffaelemontella/devel/riscv-prg32/computer-architecture-with-prg32/tools/assets/menu_main.png">    </p:cNvPr>
+          <p:cNvPr id="14" name="Image 0" descr="/Users/raffaelemontella/devel/riscv-prg32/computer-architecture-with-prg32/tools/assets/menu_main.png">    </p:cNvPr>
           <p:cNvPicPr>
             <a:picLocks noChangeAspect="1"/>
           </p:cNvPicPr>
@@ -15325,8 +15383,8 @@
         </p:blipFill>
         <p:spPr>
           <a:xfrm>
-            <a:off x="7863840" y="1978890"/>
-            <a:ext cx="3779215" cy="3174541"/>
+            <a:off x="7863840" y="2148954"/>
+            <a:ext cx="3779215" cy="2834411"/>
           </a:xfrm>
           <a:prstGeom prst="rect">
             <a:avLst/>
@@ -15366,7 +15424,7 @@
                 <a:ea typeface="Calibri" pitchFamily="34" charset="-122"/>
                 <a:cs typeface="Calibri" pitchFamily="34" charset="-120"/>
               </a:rPr>
-              <a:t>SN74LS273: otto flip-flop D con un clock comune</a:t>
+              <a:t>Un 74LS273 su una scheda: otto flip-flop D con un clock comune</a:t>
             </a:r>
             <a:endParaRPr lang="en-US" sz="1200" dirty="0"/>
           </a:p>
@@ -16710,8 +16768,8 @@
         </p:blipFill>
         <p:spPr>
           <a:xfrm>
-            <a:off x="7863840" y="2230837"/>
-            <a:ext cx="3779215" cy="2670645"/>
+            <a:off x="7863840" y="1846322"/>
+            <a:ext cx="3779215" cy="3439676"/>
           </a:xfrm>
           <a:prstGeom prst="rect">
             <a:avLst/>
@@ -16751,7 +16809,7 @@
                 <a:ea typeface="Calibri" pitchFamily="34" charset="-122"/>
                 <a:cs typeface="Calibri" pitchFamily="34" charset="-120"/>
               </a:rPr>
-              <a:t>Linee di bus su un circuito stampato</a:t>
+              <a:t>Piste di rame su un circuito stampato</a:t>
             </a:r>
             <a:endParaRPr lang="en-US" sz="1200" dirty="0"/>
           </a:p>

--- a/it/slides/14-Architettura_dei_Calcolatori-Registri_e_Bus.pptx
+++ b/it/slides/14-Architettura_dei_Calcolatori-Registri_e_Bus.pptx
@@ -126,19 +126,19 @@
   <p:extLst>
     <p:ext uri="{521415D9-36F7-43E2-AB2F-B90AF26B5E84}">
       <p14:sectionLst xmlns:p14="http://schemas.microsoft.com/office/powerpoint/2010/main">
-        <p14:section name="Apertura" id="{402ec39d-e658-ea79-42e2-a3acba421836}">
+        <p14:section name="Apertura" id="{939c6c0e-b123-6229-d3e0-6226ce11b9f0}">
           <p14:sldIdLst>
             <p14:sldId id="256"/>
             <p14:sldId id="257"/>
           </p14:sldIdLst>
         </p14:section>
-        <p14:section name="Porte di parola e registri" id="{31f9f3e6-083e-2277-1c5d-00a282895b38}">
+        <p14:section name="Porte di parola e registri" id="{33e8b679-47ff-aa23-d499-2f2647490250}">
           <p14:sldIdLst>
             <p14:sldId id="258"/>
             <p14:sldId id="259"/>
           </p14:sldIdLst>
         </p14:section>
-        <p14:section name="Bus" id="{5952ab1c-b177-1ada-1871-844f6a2f12e6}">
+        <p14:section name="Bus" id="{6b6cc6cf-a9e9-b1b3-ccfc-f9d4e4893ce8}">
           <p14:sldIdLst>
             <p14:sldId id="260"/>
             <p14:sldId id="261"/>
@@ -146,14 +146,14 @@
             <p14:sldId id="263"/>
           </p14:sldIdLst>
         </p14:section>
-        <p14:section name="Buffer a tre stati" id="{c473e26f-b8fc-0fef-033c-c5a95ca1b4ef}">
+        <p14:section name="Buffer a tre stati" id="{efd7e1b8-07f4-3d54-69cb-bedef2f3db35}">
           <p14:sldIdLst>
             <p14:sldId id="264"/>
             <p14:sldId id="265"/>
             <p14:sldId id="266"/>
           </p14:sldIdLst>
         </p14:section>
-        <p14:section name="Registri a scorrimento" id="{2f07dfb3-2f08-90b3-2865-b915372c6be8}">
+        <p14:section name="Registri a scorrimento" id="{e2b72b0d-dcd3-fa42-8597-3cbe67a47d3d}">
           <p14:sldIdLst>
             <p14:sldId id="267"/>
             <p14:sldId id="268"/>
@@ -162,7 +162,7 @@
             <p14:sldId id="271"/>
           </p14:sldIdLst>
         </p14:section>
-        <p14:section name="Ritorno alla macchina" id="{8981545c-5061-47f4-6ca6-19c196a06fee}">
+        <p14:section name="Ritorno alla macchina" id="{54efe03d-961b-380d-4650-bd095d8f4b05}">
           <p14:sldIdLst>
             <p14:sldId id="272"/>
             <p14:sldId id="273"/>
@@ -575,6 +575,8 @@
             <a:r>
               <a:rPr lang="en-US" dirty="0"/>
               <a:t>La lezione precedente ha costruito un registro con i flip-flop. Questa si chiede come i registri si parlano: come una parola passa dall'uno all'altro, lungo quali fili, e che cosa accade quando molti registri condividono gli stessi fili. Le risposte sono il bus, il buffer a tre stati e il registro a scorrimento. La battuta di Doc Brown in copertina qui è ironica: ai dati le strade servono, e un bus è esattamente una strada. Il riscaldamento parte da un fatto del kit: il suo display riceve ogni pixel un bit alla volta.
+Stato di apprendimento: DA COMPRENDERE OGGI, alla fine di questa lezione lo spiegate, lo seguite passo passo e lo applicate da soli; DA UTILIZZARE OGGI, oggi seguite e usate la ricetta; come funziona dentro si spiega più avanti, o non fa parte del corso; DA COMPRENDERE PIÙ AVANTI, riconoscete il nome e lo scopo; lo spiega una lezione successiva. Una slide senza etichetta è contesto: una storia, un esempio, una domanda, un esercizio.
+Stato di apprendimento di questa lezione. DA COMPRENDERE OGGI: i registri a scorrimento; i registri come flip-flop; bus e porte three-state. DA UTILIZZARE OGGI: il programma completo, gli strumenti di PRG32 (si usa, non si studia, in questo corso). DA COMPRENDERE PIÙ AVANTI: l'I/O mappato in memoria (Lezione 15); memorie e indirizzi (Lezione 15). Una slide senza etichetta è contesto: una storia, un esempio, una domanda, un esercizio.
 Per il docente: Spirale: il display del kit PRG32 riceve ogni pixel un bit alla volta; il riscaldamento invia un byte in serie in assembly, e la lezione costruisce le macchine che lo fanno in hardware.</a:t>
             </a:r>
             <a:endParaRPr lang="en-US" dirty="0"/>
@@ -664,6 +666,7 @@
             <a:r>
               <a:rPr lang="en-US" dirty="0"/>
               <a:t>Applicata a un'intera parola, una porta a tre stati lascia passare un bus oppure lo scollega: quando l'abilitazione è attiva il bus di uscita riproduce quello di ingresso; altrimenti tutte le sue linee sono in alta impedenza. I piedini del chip del kit funzionano così: ciascuno può essere configurato come uscita, che pilota il filo, oppure rilasciato e usato come ingresso. I piedini del joystick sono ingressi; quelli del display sono uscite.
+DA COMPRENDERE OGGI: bus e porte three-state.
 Per il docente: Tristate di parola. Sul kit i piedini del joystick sono configurati come ingressi (i loro buffer di uscita in alta impedenza) e quelli del display come uscite.</a:t>
             </a:r>
             <a:endParaRPr lang="en-US" dirty="0"/>
@@ -753,6 +756,7 @@
             <a:r>
               <a:rPr lang="en-US" dirty="0"/>
               <a:t>Lo schema completo di un bus comune. Ogni registro sorgente raggiunge il bus attraverso un buffer a tre stati con la propria abilitazione. La regola è rigida: al più un'abilitazione è attiva alla volta, così una sorgente pilota il bus e tutte le altre sono scollegate. Dall'altro lato ogni registro destinazione è collegato al bus, e prende il dato solo quello il cui segnale di caricamento è attivo. Scegliere sorgente e destinazione è compito dei decodificatori pilotati dall'unità di controllo.
+DA COMPRENDERE OGGI: bus e porte three-state.
 Per il docente: Collegamento di bus: OR di bus; trasferimento verso registri-destinazione. Dentro i chip moderni le lunghe linee condivise sono di solito sostituite da multiplexer, che fanno la stessa selezione senza stati di alta impedenza; tra chip i bus a tre stati restano la regola.</a:t>
             </a:r>
             <a:endParaRPr lang="en-US" dirty="0"/>
@@ -842,6 +846,7 @@
             <a:r>
               <a:rPr lang="en-US" dirty="0"/>
               <a:t>Un registro a scorrimento è una catena di celle da un bit in cui, a ogni impulso di clock, ogni bit passa alla cella adiacente. Ogni cella è un flip-flop D il cui ingresso è l'uscita della cella vicina. Il comportamento sensibile al fronte del flip-flop è essenziale: con latch trasparenti un bit attraverserebbe l'intera catena durante un solo impulso di clock. Lo scorrimento può avere un verso fisso oppure un verso scelto da una linea di controllo.
+DA COMPRENDERE OGGI: i registri a scorrimento.
 Per il docente: In inglese: shift registers. Qui i flip-flop sensibili al fronte sono essenziali: con latch trasparenti un bit attraverserebbe l'intera catena in un solo impulso di clock (Lezione 13).</a:t>
             </a:r>
             <a:endParaRPr lang="en-US" dirty="0"/>
@@ -931,6 +936,7 @@
             <a:r>
               <a:rPr lang="en-US" dirty="0"/>
               <a:t>La stessa catena di flip-flop dà quattro macchine, a seconda di dove entrano ed escono i dati. Ingresso seriale, uscita seriale: una linea di ritardo. Ingresso seriale, uscita parallela: raccoglie bit che arrivano uno alla volta e presenta la parola intera. Ingresso parallelo, uscita seriale: prende una parola e la manda fuori bit per bit. Ingresso parallelo, uscita parallela, senza scorrimento, è il registro ordinario. La seconda e la terza sono i due capi di ogni collegamento seriale.
+DA COMPRENDERE OGGI: i registri a scorrimento.
 Per il docente: SISO, SIPO, PISO e PIPO. La linea di clock non è disegnata.</a:t>
             </a:r>
             <a:endParaRPr lang="en-US" dirty="0"/>
@@ -1020,6 +1026,7 @@
             <a:r>
               <a:rPr lang="en-US" dirty="0"/>
               <a:t>Due modi di spostare una parola tra registri. In un trasferimento seriale l'uscita seriale di un registro a scorrimento alimenta l'ingresso seriale di un altro: n impulsi di clock, un filo. In un trasferimento parallelo le uscite di un registro alimentano gli ingressi di un altro: un impulso di clock, n fili. La frase a destra è il compromesso di tutta la lezione: spostare una parola di n bit costa o tempo o rame.
+DA COMPRENDERE OGGI: i registri a scorrimento.
 Per il docente: Trasferimento seriale (ingresso seriale, uscita seriale) e trasferimento parallelo (ingresso parallelo, uscita parallela).</a:t>
             </a:r>
             <a:endParaRPr lang="en-US" dirty="0"/>
@@ -1109,6 +1116,7 @@
             <a:r>
               <a:rPr lang="en-US" dirty="0"/>
               <a:t>Un collegamento seriale completo in cinque passi: il dato viene caricato in parallelo in un registro a scorrimento; ne esce, un bit per passo; i bit viaggiano su una sola linea; all'altro capo un secondo registro a scorrimento li raccoglie, uno per passo; e la parola ricostruita viene passata avanti in parallelo. È l'hardware del riscaldamento, ed è così che il display del kit riceve ogni pixel. Ogni standard seriale, dalla vecchia porta seriale a USB, poggia su una coppia di registri a scorrimento.
+DA COMPRENDERE OGGI: i registri a scorrimento.
 Per il docente: Trasformazione serie-parallelo di un dato. UART, SPI, I2C, I2S e USB poggiano tutti su una coppia di registri a scorrimento, uno per estremità.</a:t>
             </a:r>
             <a:endParaRPr lang="en-US" dirty="0"/>
@@ -1198,6 +1206,7 @@
             <a:r>
               <a:rPr lang="en-US" dirty="0"/>
               <a:t>Quattro registri di tre bit e un decodificatore fanno una piccola memoria. Due linee di indirizzo scelgono, attraverso il decodificatore, uno dei quattro registri; tre linee portano i dati in ingresso e tre li portano in uscita. La completano tre linee di controllo: chip select, perché la memoria risponda solo quando è selezionata; una linea che dice lettura o scrittura; e output enable, che comanda uscite a tre stati così che più memorie possano condividere un bus. Qui non c'è nulla di nuovo: decodificatore, registri, buffer a tre stati. La prossima lezione lo porta su scala più grande.
+DA COMPRENDERE OGGI: i registri come flip-flop. DA COMPRENDERE PIÙ AVANTI: memorie e indirizzi (si studia nella Lezione 15).
 Per il docente: Memoria 4 (registri) x 3 (bit): otto ingressi (I0-I2, A0-A1, CS, RD, OE) e tre uscite. La prossima lezione porta questo schema alla scala della memoria centrale.</a:t>
             </a:r>
             <a:endParaRPr lang="en-US" dirty="0"/>
@@ -1643,6 +1652,7 @@
             <a:r>
               <a:rPr lang="en-US" dirty="0"/>
               <a:t>Cinque conclusioni. Un registro è una forma di memoria con un modo di funzionare elementare. I registri si leggono e si scrivono attraverso i bus. A un bus comune servono circuiti a tre stati: 0, 1 e scollegato. I dati viaggiano in serie o in parallelo, e i registri a scorrimento convertono tra le due forme. E un decodificatore davanti a un gruppo di registri fa una memoria, che è l'argomento della prossima lezione.
+Stato di apprendimento, riepilogo. DA COMPRENDERE OGGI: i registri a scorrimento; i registri come flip-flop; bus e porte three-state. DA UTILIZZARE OGGI: il programma completo, gli strumenti di PRG32 (si usa, non si studia, in questo corso). DA COMPRENDERE PIÙ AVANTI: l'I/O mappato in memoria (Lezione 15); memorie e indirizzi (Lezione 15). Una slide senza etichetta è contesto: una storia, un esempio, una domanda, un esercizio.
 Per il docente: Prossima lezione: la memoria.</a:t>
             </a:r>
             <a:endParaRPr lang="en-US" dirty="0"/>
@@ -1732,6 +1742,7 @@
             <a:r>
               <a:rPr lang="en-US" dirty="0"/>
               <a:t>Una parola è un vettore di n bit. Una porta di parola sono n porte identiche con un ingresso di controllo comune: con il controllo a 1 la parola passa invariata, con il controllo a 0 ogni bit è forzato a 0. È l'estensione naturale di una porta da un bit a una parola. Le istruzioni bit a bit di RISC-V sono porte di parola larghe trentadue bit, e con esse è costruito il multiplexer su parole della Lezione 11.
+DA COMPRENDERE OGGI: i registri come flip-flop.
 Per il docente: In inglese: word gates. Il multiplexer su parole della Lezione 11 è costruito con porte di parola.</a:t>
             </a:r>
             <a:endParaRPr lang="en-US" dirty="0"/>
@@ -1821,6 +1832,7 @@
             <a:r>
               <a:rPr lang="en-US" dirty="0"/>
               <a:t>Un registro memorizza un gruppo di bit: nella forma più semplice è un gruppo di flip-flop con un clock comune. L'esempio classico in un solo chip è il 74273, con otto flip-flop D, un clock e un clear. Caricare un registro significa memorizzare il dato presente ai suoi ingressi, e accade quando il segnale di caricamento è attivo, di norma in sincronia con il clock. Ciascuno dei registri da x1 a x31 di RISC-V è fatto di trentadue flip-flop di questo tipo.
+DA COMPRENDERE OGGI: i registri come flip-flop.
 Per il docente: Datasheet: ti.com/lit/ds/symlink/sn74ls273.pdf. Il 7474 contiene due flip-flop D con preset e clear. Per il flip-flop si veda la Lezione 13.
 Immagini: Animation Technologies LifeView LR25 - Hitachi LS273-2523.jpg, Raimond Spekking, CC BY-SA 4.0, Wikimedia Commons.</a:t>
             </a:r>
@@ -1911,6 +1923,7 @@
             <a:r>
               <a:rPr lang="en-US" dirty="0"/>
               <a:t>Un bus è l'insieme delle linee che trasporta un dato tra i componenti di un sistema. La parola viene dal latino omnibus, «per tutti». Un bus di n linee trasporta in un passo una parola di n bit. Il trasferimento da un registro X a un registro Y è l'azione elementare da cui si costruisce tutto il resto: quasi ogni istruzione che avete scritto è, sotto sotto, una breve sequenza di trasferimenti tra registri.
+DA COMPRENDERE OGGI: bus e porte three-state.
 Per il docente: Quasi ogni istruzione della Lezione 02 è, in fondo, una sequenza di trasferimenti tra registri.</a:t>
             </a:r>
             <a:endParaRPr lang="en-US" dirty="0"/>
@@ -2000,6 +2013,7 @@
             <a:r>
               <a:rPr lang="en-US" dirty="0"/>
               <a:t>Due modi di collegare i registri. Con i bus dedicati ogni possibile trasferimento ha le proprie linee: più trasferimenti possono avvenire insieme, ma i fili crescono con il quadrato del numero di registri. Con un bus comune un solo percorso serve tutti i trasferimenti: ogni volta si scelgono una sorgente e una destinazione, e un trasferimento richiede due passi, dalla sorgente al bus e dal bus alla destinazione. È economico e diffuso, al prezzo di fare un trasferimento alla volta.
+DA COMPRENDERE OGGI: bus e porte three-state.
 Per il docente: Esistono soluzioni intermedie: più bus, ciascuno condiviso da un gruppo di registri. I processori reali le usano.</a:t>
             </a:r>
             <a:endParaRPr lang="en-US" dirty="0"/>
@@ -2089,6 +2103,7 @@
             <a:r>
               <a:rPr lang="en-US" dirty="0"/>
               <a:t>Un trasferimento può essere parallelo, con gli n bit che viaggiano insieme su n linee in un passo, oppure seriale, con i bit che viaggiano uno dopo l'altro su una sola linea in n passi, oppure misto, per esempio un byte alla volta. Ricordate l'ultima riga: dentro un chip i bus sono paralleli; tra chip e tra macchine oggi sono quasi sempre seriali, perché ad altissima velocità è più facile tenere pulita una linea che tenere al passo trentadue linee.
+DA COMPRENDERE OGGI: bus e porte three-state.
 Per il docente: USB, SATA, PCI Express, HDMI ed Ethernet sono tutti seriali: ad altissima velocità è più facile tenere pulita una linea veloce che tenere al passo trentadue linee.
 Immagini: Hand Etched PCB.png, Tpdwkouaa, CC BY-SA 4.0, Wikimedia Commons.</a:t>
             </a:r>
@@ -2179,6 +2194,7 @@
             <a:r>
               <a:rPr lang="en-US" dirty="0"/>
               <a:t>Le due metà di un trasferimento su bus comune. A sinistra, dal bus a un registro: il dato sul bus viene caricato in R quando il segnale di caricamento è attivo. A destra, da un registro al bus: le uscite di R raggiungono il bus attraverso un buffer, e solo finché il segnale di abilitazione è attivo. La domanda in fondo porta alla sezione successiva: quando l'abilitazione non è attiva, che cosa deve essere l'uscita del buffer, per non disturbare il bus?
+DA COMPRENDERE OGGI: bus e porte three-state.
 Per il docente: Trasferimento dati su bus unico: caricamento di un registro (da bus a registro) e trasferimento da registro a bus.</a:t>
             </a:r>
             <a:endParaRPr lang="en-US" dirty="0"/>
@@ -2268,6 +2284,7 @@
             <a:r>
               <a:rPr lang="en-US" dirty="0"/>
               <a:t>Un'uscita a tre stati ha una terza condizione oltre a 0 e 1: l'alta impedenza, indicata con z, in cui l'uscita è elettricamente scollegata dal filo. Decide un ingresso di abilitazione: quando vale 1 la porta lavora normalmente, quando vale 0 l'uscita è z. La tabella lo mostra per un AND con abilitazione: quattro righe di un AND ordinario, e un'ultima riga in cui l'uscita è flottante quali che siano gli ingressi. Elettricamente, entrambi i transistor dello stadio di uscita sono spenti.
+DA COMPRENDERE OGGI: bus e porte three-state.
 Per il docente: AND tristate; segnale di abilitazione in logica 1-attiva. Elettricamente, entrambi i transistor di uscita sono spenti.</a:t>
             </a:r>
             <a:endParaRPr lang="en-US" dirty="0"/>
@@ -3405,6 +3422,420 @@
       </p:pic>
       <p:sp>
         <p:nvSpPr>
+          <p:cNvPr id="15" name="Shape 12"/>
+          <p:cNvSpPr/>
+          <p:nvPr/>
+        </p:nvSpPr>
+        <p:spPr>
+          <a:xfrm>
+            <a:off x="8910777" y="91440"/>
+            <a:ext cx="2732278" cy="274320"/>
+          </a:xfrm>
+          <a:prstGeom prst="rect">
+            <a:avLst/>
+          </a:prstGeom>
+          <a:solidFill>
+            <a:srgbClr val="F3E8FF"/>
+          </a:solidFill>
+          <a:ln w="12700">
+            <a:solidFill>
+              <a:srgbClr val="7E22CE"/>
+            </a:solidFill>
+            <a:prstDash val="dash"/>
+          </a:ln>
+        </p:spPr>
+      </p:sp>
+      <p:sp>
+        <p:nvSpPr>
+          <p:cNvPr id="16" name="Shape 13"/>
+          <p:cNvSpPr/>
+          <p:nvPr/>
+        </p:nvSpPr>
+        <p:spPr>
+          <a:xfrm>
+            <a:off x="8938209" y="128016"/>
+            <a:ext cx="45720" cy="45720"/>
+          </a:xfrm>
+          <a:prstGeom prst="rect">
+            <a:avLst/>
+          </a:prstGeom>
+          <a:solidFill>
+            <a:srgbClr val="7E22CE"/>
+          </a:solidFill>
+          <a:ln w="12700">
+            <a:solidFill>
+              <a:srgbClr val="7E22CE"/>
+            </a:solidFill>
+            <a:prstDash val="solid"/>
+          </a:ln>
+        </p:spPr>
+      </p:sp>
+      <p:sp>
+        <p:nvSpPr>
+          <p:cNvPr id="17" name="Shape 14"/>
+          <p:cNvSpPr/>
+          <p:nvPr/>
+        </p:nvSpPr>
+        <p:spPr>
+          <a:xfrm>
+            <a:off x="8938209" y="205740"/>
+            <a:ext cx="45720" cy="45720"/>
+          </a:xfrm>
+          <a:prstGeom prst="rect">
+            <a:avLst/>
+          </a:prstGeom>
+          <a:solidFill>
+            <a:srgbClr val="7E22CE"/>
+          </a:solidFill>
+          <a:ln w="12700">
+            <a:solidFill>
+              <a:srgbClr val="7E22CE"/>
+            </a:solidFill>
+            <a:prstDash val="solid"/>
+          </a:ln>
+        </p:spPr>
+      </p:sp>
+      <p:sp>
+        <p:nvSpPr>
+          <p:cNvPr id="18" name="Shape 15"/>
+          <p:cNvSpPr/>
+          <p:nvPr/>
+        </p:nvSpPr>
+        <p:spPr>
+          <a:xfrm>
+            <a:off x="8938209" y="283464"/>
+            <a:ext cx="45720" cy="45720"/>
+          </a:xfrm>
+          <a:prstGeom prst="rect">
+            <a:avLst/>
+          </a:prstGeom>
+          <a:solidFill>
+            <a:srgbClr val="7E22CE"/>
+          </a:solidFill>
+          <a:ln w="12700">
+            <a:solidFill>
+              <a:srgbClr val="7E22CE"/>
+            </a:solidFill>
+            <a:prstDash val="solid"/>
+          </a:ln>
+        </p:spPr>
+      </p:sp>
+      <p:pic>
+        <p:nvPicPr>
+          <p:cNvPr id="19" name="Image 1" descr="preencoded.png">    </p:cNvPr>
+          <p:cNvPicPr>
+            <a:picLocks noChangeAspect="1"/>
+          </p:cNvPicPr>
+          <p:nvPr/>
+        </p:nvPicPr>
+        <p:blipFill>
+          <a:blip r:embed="rId2"/>
+          <a:stretch>
+            <a:fillRect/>
+          </a:stretch>
+        </p:blipFill>
+        <p:spPr>
+          <a:xfrm>
+            <a:off x="9038793" y="128016"/>
+            <a:ext cx="201168" cy="201168"/>
+          </a:xfrm>
+          <a:prstGeom prst="rect">
+            <a:avLst/>
+          </a:prstGeom>
+        </p:spPr>
+      </p:pic>
+      <p:sp>
+        <p:nvSpPr>
+          <p:cNvPr id="20" name="Text 16"/>
+          <p:cNvSpPr txBox="1"/>
+          <p:nvPr/>
+        </p:nvSpPr>
+        <p:spPr>
+          <a:xfrm>
+            <a:off x="9294825" y="91440"/>
+            <a:ext cx="2311654" cy="274320"/>
+          </a:xfrm>
+          <a:prstGeom prst="rect">
+            <a:avLst/>
+          </a:prstGeom>
+          <a:noFill/>
+          <a:ln/>
+        </p:spPr>
+        <p:txBody>
+          <a:bodyPr wrap="square" lIns="0" tIns="0" rIns="0" bIns="0" rtlCol="0" anchor="ctr"/>
+          <a:lstStyle/>
+          <a:p>
+            <a:pPr indent="0" marL="0">
+              <a:buNone/>
+            </a:pPr>
+            <a:r>
+              <a:rPr lang="en-US" sz="1100" b="1" dirty="0">
+                <a:solidFill>
+                  <a:srgbClr val="6B21A8"/>
+                </a:solidFill>
+                <a:latin typeface="Calibri" pitchFamily="34" charset="0"/>
+                <a:ea typeface="Calibri" pitchFamily="34" charset="-122"/>
+                <a:cs typeface="Calibri" pitchFamily="34" charset="-120"/>
+              </a:rPr>
+              <a:t>DA COMPRENDERE PIÙ AVANTI</a:t>
+            </a:r>
+            <a:endParaRPr lang="en-US" sz="1100" dirty="0"/>
+          </a:p>
+        </p:txBody>
+      </p:sp>
+      <p:sp>
+        <p:nvSpPr>
+          <p:cNvPr id="21" name="Shape 17"/>
+          <p:cNvSpPr/>
+          <p:nvPr/>
+        </p:nvSpPr>
+        <p:spPr>
+          <a:xfrm>
+            <a:off x="6675069" y="91440"/>
+            <a:ext cx="2125980" cy="274320"/>
+          </a:xfrm>
+          <a:prstGeom prst="rect">
+            <a:avLst/>
+          </a:prstGeom>
+          <a:solidFill>
+            <a:srgbClr val="FEF3C7"/>
+          </a:solidFill>
+          <a:ln w="12700">
+            <a:solidFill>
+              <a:srgbClr val="B45309"/>
+            </a:solidFill>
+            <a:prstDash val="solid"/>
+          </a:ln>
+        </p:spPr>
+      </p:sp>
+      <p:sp>
+        <p:nvSpPr>
+          <p:cNvPr id="22" name="Shape 18"/>
+          <p:cNvSpPr/>
+          <p:nvPr/>
+        </p:nvSpPr>
+        <p:spPr>
+          <a:xfrm>
+            <a:off x="6675069" y="91440"/>
+            <a:ext cx="27432" cy="274320"/>
+          </a:xfrm>
+          <a:prstGeom prst="rect">
+            <a:avLst/>
+          </a:prstGeom>
+          <a:solidFill>
+            <a:srgbClr val="B45309"/>
+          </a:solidFill>
+          <a:ln w="12700">
+            <a:solidFill>
+              <a:srgbClr val="B45309"/>
+            </a:solidFill>
+            <a:prstDash val="solid"/>
+          </a:ln>
+        </p:spPr>
+      </p:sp>
+      <p:sp>
+        <p:nvSpPr>
+          <p:cNvPr id="23" name="Shape 19"/>
+          <p:cNvSpPr/>
+          <p:nvPr/>
+        </p:nvSpPr>
+        <p:spPr>
+          <a:xfrm>
+            <a:off x="6729933" y="91440"/>
+            <a:ext cx="27432" cy="274320"/>
+          </a:xfrm>
+          <a:prstGeom prst="rect">
+            <a:avLst/>
+          </a:prstGeom>
+          <a:solidFill>
+            <a:srgbClr val="B45309"/>
+          </a:solidFill>
+          <a:ln w="12700">
+            <a:solidFill>
+              <a:srgbClr val="B45309"/>
+            </a:solidFill>
+            <a:prstDash val="solid"/>
+          </a:ln>
+        </p:spPr>
+      </p:sp>
+      <p:pic>
+        <p:nvPicPr>
+          <p:cNvPr id="24" name="Image 2" descr="preencoded.png">    </p:cNvPr>
+          <p:cNvPicPr>
+            <a:picLocks noChangeAspect="1"/>
+          </p:cNvPicPr>
+          <p:nvPr/>
+        </p:nvPicPr>
+        <p:blipFill>
+          <a:blip r:embed="rId3"/>
+          <a:stretch>
+            <a:fillRect/>
+          </a:stretch>
+        </p:blipFill>
+        <p:spPr>
+          <a:xfrm>
+            <a:off x="6803085" y="128016"/>
+            <a:ext cx="201168" cy="201168"/>
+          </a:xfrm>
+          <a:prstGeom prst="rect">
+            <a:avLst/>
+          </a:prstGeom>
+        </p:spPr>
+      </p:pic>
+      <p:sp>
+        <p:nvSpPr>
+          <p:cNvPr id="25" name="Text 20"/>
+          <p:cNvSpPr txBox="1"/>
+          <p:nvPr/>
+        </p:nvSpPr>
+        <p:spPr>
+          <a:xfrm>
+            <a:off x="7059117" y="91440"/>
+            <a:ext cx="1705356" cy="274320"/>
+          </a:xfrm>
+          <a:prstGeom prst="rect">
+            <a:avLst/>
+          </a:prstGeom>
+          <a:noFill/>
+          <a:ln/>
+        </p:spPr>
+        <p:txBody>
+          <a:bodyPr wrap="square" lIns="0" tIns="0" rIns="0" bIns="0" rtlCol="0" anchor="ctr"/>
+          <a:lstStyle/>
+          <a:p>
+            <a:pPr indent="0" marL="0">
+              <a:buNone/>
+            </a:pPr>
+            <a:r>
+              <a:rPr lang="en-US" sz="1100" b="1" dirty="0">
+                <a:solidFill>
+                  <a:srgbClr val="92400E"/>
+                </a:solidFill>
+                <a:latin typeface="Calibri" pitchFamily="34" charset="0"/>
+                <a:ea typeface="Calibri" pitchFamily="34" charset="-122"/>
+                <a:cs typeface="Calibri" pitchFamily="34" charset="-120"/>
+              </a:rPr>
+              <a:t>DA UTILIZZARE OGGI</a:t>
+            </a:r>
+            <a:endParaRPr lang="en-US" sz="1100" dirty="0"/>
+          </a:p>
+        </p:txBody>
+      </p:sp>
+      <p:sp>
+        <p:nvSpPr>
+          <p:cNvPr id="26" name="Shape 21"/>
+          <p:cNvSpPr/>
+          <p:nvPr/>
+        </p:nvSpPr>
+        <p:spPr>
+          <a:xfrm>
+            <a:off x="4352747" y="91440"/>
+            <a:ext cx="2212594" cy="274320"/>
+          </a:xfrm>
+          <a:prstGeom prst="rect">
+            <a:avLst/>
+          </a:prstGeom>
+          <a:solidFill>
+            <a:srgbClr val="E0F2FE"/>
+          </a:solidFill>
+          <a:ln w="12700">
+            <a:solidFill>
+              <a:srgbClr val="0369A1"/>
+            </a:solidFill>
+            <a:prstDash val="solid"/>
+          </a:ln>
+        </p:spPr>
+      </p:sp>
+      <p:sp>
+        <p:nvSpPr>
+          <p:cNvPr id="27" name="Shape 22"/>
+          <p:cNvSpPr/>
+          <p:nvPr/>
+        </p:nvSpPr>
+        <p:spPr>
+          <a:xfrm>
+            <a:off x="4352747" y="91440"/>
+            <a:ext cx="73152" cy="274320"/>
+          </a:xfrm>
+          <a:prstGeom prst="rect">
+            <a:avLst/>
+          </a:prstGeom>
+          <a:solidFill>
+            <a:srgbClr val="0369A1"/>
+          </a:solidFill>
+          <a:ln w="12700">
+            <a:solidFill>
+              <a:srgbClr val="0369A1"/>
+            </a:solidFill>
+            <a:prstDash val="solid"/>
+          </a:ln>
+        </p:spPr>
+      </p:sp>
+      <p:pic>
+        <p:nvPicPr>
+          <p:cNvPr id="28" name="Image 3" descr="preencoded.png">    </p:cNvPr>
+          <p:cNvPicPr>
+            <a:picLocks noChangeAspect="1"/>
+          </p:cNvPicPr>
+          <p:nvPr/>
+        </p:nvPicPr>
+        <p:blipFill>
+          <a:blip r:embed="rId4"/>
+          <a:stretch>
+            <a:fillRect/>
+          </a:stretch>
+        </p:blipFill>
+        <p:spPr>
+          <a:xfrm>
+            <a:off x="4480763" y="128016"/>
+            <a:ext cx="201168" cy="201168"/>
+          </a:xfrm>
+          <a:prstGeom prst="rect">
+            <a:avLst/>
+          </a:prstGeom>
+        </p:spPr>
+      </p:pic>
+      <p:sp>
+        <p:nvSpPr>
+          <p:cNvPr id="29" name="Text 23"/>
+          <p:cNvSpPr txBox="1"/>
+          <p:nvPr/>
+        </p:nvSpPr>
+        <p:spPr>
+          <a:xfrm>
+            <a:off x="4736795" y="91440"/>
+            <a:ext cx="1791970" cy="274320"/>
+          </a:xfrm>
+          <a:prstGeom prst="rect">
+            <a:avLst/>
+          </a:prstGeom>
+          <a:noFill/>
+          <a:ln/>
+        </p:spPr>
+        <p:txBody>
+          <a:bodyPr wrap="square" lIns="0" tIns="0" rIns="0" bIns="0" rtlCol="0" anchor="ctr"/>
+          <a:lstStyle/>
+          <a:p>
+            <a:pPr indent="0" marL="0">
+              <a:buNone/>
+            </a:pPr>
+            <a:r>
+              <a:rPr lang="en-US" sz="1100" b="1" dirty="0">
+                <a:solidFill>
+                  <a:srgbClr val="075985"/>
+                </a:solidFill>
+                <a:latin typeface="Calibri" pitchFamily="34" charset="0"/>
+                <a:ea typeface="Calibri" pitchFamily="34" charset="-122"/>
+                <a:cs typeface="Calibri" pitchFamily="34" charset="-120"/>
+              </a:rPr>
+              <a:t>DA COMPRENDERE OGGI</a:t>
+            </a:r>
+            <a:endParaRPr lang="en-US" sz="1100" dirty="0"/>
+          </a:p>
+        </p:txBody>
+      </p:sp>
+      <p:sp>
+        <p:nvSpPr>
           <p:cNvPr id="25" name="Slide Number Placeholder 0"/>
           <p:cNvSpPr>
             <a:spLocks noGrp="1"/>
@@ -3892,6 +4323,133 @@
       </p:sp>
       <p:sp>
         <p:nvSpPr>
+          <p:cNvPr id="14" name="Shape 12"/>
+          <p:cNvSpPr/>
+          <p:nvPr/>
+        </p:nvSpPr>
+        <p:spPr>
+          <a:xfrm>
+            <a:off x="7723327" y="91440"/>
+            <a:ext cx="3919728" cy="274320"/>
+          </a:xfrm>
+          <a:prstGeom prst="rect">
+            <a:avLst/>
+          </a:prstGeom>
+          <a:solidFill>
+            <a:srgbClr val="E0F2FE"/>
+          </a:solidFill>
+          <a:ln w="12700">
+            <a:solidFill>
+              <a:srgbClr val="0369A1"/>
+            </a:solidFill>
+            <a:prstDash val="solid"/>
+          </a:ln>
+        </p:spPr>
+      </p:sp>
+      <p:sp>
+        <p:nvSpPr>
+          <p:cNvPr id="15" name="Shape 13"/>
+          <p:cNvSpPr/>
+          <p:nvPr/>
+        </p:nvSpPr>
+        <p:spPr>
+          <a:xfrm>
+            <a:off x="7723327" y="91440"/>
+            <a:ext cx="73152" cy="274320"/>
+          </a:xfrm>
+          <a:prstGeom prst="rect">
+            <a:avLst/>
+          </a:prstGeom>
+          <a:solidFill>
+            <a:srgbClr val="0369A1"/>
+          </a:solidFill>
+          <a:ln w="12700">
+            <a:solidFill>
+              <a:srgbClr val="0369A1"/>
+            </a:solidFill>
+            <a:prstDash val="solid"/>
+          </a:ln>
+        </p:spPr>
+      </p:sp>
+      <p:pic>
+        <p:nvPicPr>
+          <p:cNvPr id="16" name="Image 0" descr="preencoded.png">    </p:cNvPr>
+          <p:cNvPicPr>
+            <a:picLocks noChangeAspect="1"/>
+          </p:cNvPicPr>
+          <p:nvPr/>
+        </p:nvPicPr>
+        <p:blipFill>
+          <a:blip r:embed="rId1"/>
+          <a:stretch>
+            <a:fillRect/>
+          </a:stretch>
+        </p:blipFill>
+        <p:spPr>
+          <a:xfrm>
+            <a:off x="7851343" y="128016"/>
+            <a:ext cx="201168" cy="201168"/>
+          </a:xfrm>
+          <a:prstGeom prst="rect">
+            <a:avLst/>
+          </a:prstGeom>
+        </p:spPr>
+      </p:pic>
+      <p:sp>
+        <p:nvSpPr>
+          <p:cNvPr id="17" name="Text 14"/>
+          <p:cNvSpPr txBox="1"/>
+          <p:nvPr/>
+        </p:nvSpPr>
+        <p:spPr>
+          <a:xfrm>
+            <a:off x="8107375" y="91440"/>
+            <a:ext cx="3499104" cy="274320"/>
+          </a:xfrm>
+          <a:prstGeom prst="rect">
+            <a:avLst/>
+          </a:prstGeom>
+          <a:noFill/>
+          <a:ln/>
+        </p:spPr>
+        <p:txBody>
+          <a:bodyPr wrap="square" lIns="0" tIns="0" rIns="0" bIns="0" rtlCol="0" anchor="ctr"/>
+          <a:lstStyle/>
+          <a:p>
+            <a:pPr indent="0" marL="0">
+              <a:buNone/>
+            </a:pPr>
+            <a:r>
+              <a:rPr lang="en-US" sz="1100" b="1" dirty="0">
+                <a:solidFill>
+                  <a:srgbClr val="075985"/>
+                </a:solidFill>
+                <a:latin typeface="Calibri" pitchFamily="34" charset="0"/>
+                <a:ea typeface="Calibri" pitchFamily="34" charset="-122"/>
+                <a:cs typeface="Calibri" pitchFamily="34" charset="-120"/>
+              </a:rPr>
+              <a:t>DA COMPRENDERE OGGI</a:t>
+            </a:r>
+            <a:pPr indent="0" marL="0">
+              <a:buNone/>
+            </a:pPr>
+            <a:r>
+              <a:rPr lang="en-US" sz="1100" dirty="0">
+                <a:solidFill>
+                  <a:srgbClr val="075985"/>
+                </a:solidFill>
+                <a:latin typeface="Calibri" pitchFamily="34" charset="0"/>
+                <a:ea typeface="Calibri" pitchFamily="34" charset="-122"/>
+                <a:cs typeface="Calibri" pitchFamily="34" charset="-120"/>
+              </a:rPr>
+              <a:t> · bus e porte three-state</a:t>
+            </a:r>
+            <a:endParaRPr lang="en-US" sz="1100" dirty="0"/>
+          </a:p>
+        </p:txBody>
+      </p:sp>
+      <p:sp>
+        <p:nvSpPr>
           <p:cNvPr id="25" name="Slide Number Placeholder 0"/>
           <p:cNvSpPr>
             <a:spLocks noGrp="1"/>
@@ -4967,6 +5525,133 @@
       </p:sp>
       <p:sp>
         <p:nvSpPr>
+          <p:cNvPr id="30" name="Shape 28"/>
+          <p:cNvSpPr/>
+          <p:nvPr/>
+        </p:nvSpPr>
+        <p:spPr>
+          <a:xfrm>
+            <a:off x="7723327" y="91440"/>
+            <a:ext cx="3919728" cy="274320"/>
+          </a:xfrm>
+          <a:prstGeom prst="rect">
+            <a:avLst/>
+          </a:prstGeom>
+          <a:solidFill>
+            <a:srgbClr val="E0F2FE"/>
+          </a:solidFill>
+          <a:ln w="12700">
+            <a:solidFill>
+              <a:srgbClr val="0369A1"/>
+            </a:solidFill>
+            <a:prstDash val="solid"/>
+          </a:ln>
+        </p:spPr>
+      </p:sp>
+      <p:sp>
+        <p:nvSpPr>
+          <p:cNvPr id="31" name="Shape 29"/>
+          <p:cNvSpPr/>
+          <p:nvPr/>
+        </p:nvSpPr>
+        <p:spPr>
+          <a:xfrm>
+            <a:off x="7723327" y="91440"/>
+            <a:ext cx="73152" cy="274320"/>
+          </a:xfrm>
+          <a:prstGeom prst="rect">
+            <a:avLst/>
+          </a:prstGeom>
+          <a:solidFill>
+            <a:srgbClr val="0369A1"/>
+          </a:solidFill>
+          <a:ln w="12700">
+            <a:solidFill>
+              <a:srgbClr val="0369A1"/>
+            </a:solidFill>
+            <a:prstDash val="solid"/>
+          </a:ln>
+        </p:spPr>
+      </p:sp>
+      <p:pic>
+        <p:nvPicPr>
+          <p:cNvPr id="32" name="Image 0" descr="preencoded.png">    </p:cNvPr>
+          <p:cNvPicPr>
+            <a:picLocks noChangeAspect="1"/>
+          </p:cNvPicPr>
+          <p:nvPr/>
+        </p:nvPicPr>
+        <p:blipFill>
+          <a:blip r:embed="rId1"/>
+          <a:stretch>
+            <a:fillRect/>
+          </a:stretch>
+        </p:blipFill>
+        <p:spPr>
+          <a:xfrm>
+            <a:off x="7851343" y="128016"/>
+            <a:ext cx="201168" cy="201168"/>
+          </a:xfrm>
+          <a:prstGeom prst="rect">
+            <a:avLst/>
+          </a:prstGeom>
+        </p:spPr>
+      </p:pic>
+      <p:sp>
+        <p:nvSpPr>
+          <p:cNvPr id="33" name="Text 30"/>
+          <p:cNvSpPr txBox="1"/>
+          <p:nvPr/>
+        </p:nvSpPr>
+        <p:spPr>
+          <a:xfrm>
+            <a:off x="8107375" y="91440"/>
+            <a:ext cx="3499104" cy="274320"/>
+          </a:xfrm>
+          <a:prstGeom prst="rect">
+            <a:avLst/>
+          </a:prstGeom>
+          <a:noFill/>
+          <a:ln/>
+        </p:spPr>
+        <p:txBody>
+          <a:bodyPr wrap="square" lIns="0" tIns="0" rIns="0" bIns="0" rtlCol="0" anchor="ctr"/>
+          <a:lstStyle/>
+          <a:p>
+            <a:pPr indent="0" marL="0">
+              <a:buNone/>
+            </a:pPr>
+            <a:r>
+              <a:rPr lang="en-US" sz="1100" b="1" dirty="0">
+                <a:solidFill>
+                  <a:srgbClr val="075985"/>
+                </a:solidFill>
+                <a:latin typeface="Calibri" pitchFamily="34" charset="0"/>
+                <a:ea typeface="Calibri" pitchFamily="34" charset="-122"/>
+                <a:cs typeface="Calibri" pitchFamily="34" charset="-120"/>
+              </a:rPr>
+              <a:t>DA COMPRENDERE OGGI</a:t>
+            </a:r>
+            <a:pPr indent="0" marL="0">
+              <a:buNone/>
+            </a:pPr>
+            <a:r>
+              <a:rPr lang="en-US" sz="1100" dirty="0">
+                <a:solidFill>
+                  <a:srgbClr val="075985"/>
+                </a:solidFill>
+                <a:latin typeface="Calibri" pitchFamily="34" charset="0"/>
+                <a:ea typeface="Calibri" pitchFamily="34" charset="-122"/>
+                <a:cs typeface="Calibri" pitchFamily="34" charset="-120"/>
+              </a:rPr>
+              <a:t> · bus e porte three-state</a:t>
+            </a:r>
+            <a:endParaRPr lang="en-US" sz="1100" dirty="0"/>
+          </a:p>
+        </p:txBody>
+      </p:sp>
+      <p:sp>
+        <p:nvSpPr>
           <p:cNvPr id="25" name="Slide Number Placeholder 0"/>
           <p:cNvSpPr>
             <a:spLocks noGrp="1"/>
@@ -5387,6 +6072,133 @@
       </p:sp>
       <p:sp>
         <p:nvSpPr>
+          <p:cNvPr id="12" name="Shape 10"/>
+          <p:cNvSpPr/>
+          <p:nvPr/>
+        </p:nvSpPr>
+        <p:spPr>
+          <a:xfrm>
+            <a:off x="7657668" y="91440"/>
+            <a:ext cx="3985387" cy="274320"/>
+          </a:xfrm>
+          <a:prstGeom prst="rect">
+            <a:avLst/>
+          </a:prstGeom>
+          <a:solidFill>
+            <a:srgbClr val="E0F2FE"/>
+          </a:solidFill>
+          <a:ln w="12700">
+            <a:solidFill>
+              <a:srgbClr val="0369A1"/>
+            </a:solidFill>
+            <a:prstDash val="solid"/>
+          </a:ln>
+        </p:spPr>
+      </p:sp>
+      <p:sp>
+        <p:nvSpPr>
+          <p:cNvPr id="13" name="Shape 11"/>
+          <p:cNvSpPr/>
+          <p:nvPr/>
+        </p:nvSpPr>
+        <p:spPr>
+          <a:xfrm>
+            <a:off x="7657668" y="91440"/>
+            <a:ext cx="73152" cy="274320"/>
+          </a:xfrm>
+          <a:prstGeom prst="rect">
+            <a:avLst/>
+          </a:prstGeom>
+          <a:solidFill>
+            <a:srgbClr val="0369A1"/>
+          </a:solidFill>
+          <a:ln w="12700">
+            <a:solidFill>
+              <a:srgbClr val="0369A1"/>
+            </a:solidFill>
+            <a:prstDash val="solid"/>
+          </a:ln>
+        </p:spPr>
+      </p:sp>
+      <p:pic>
+        <p:nvPicPr>
+          <p:cNvPr id="14" name="Image 0" descr="preencoded.png">    </p:cNvPr>
+          <p:cNvPicPr>
+            <a:picLocks noChangeAspect="1"/>
+          </p:cNvPicPr>
+          <p:nvPr/>
+        </p:nvPicPr>
+        <p:blipFill>
+          <a:blip r:embed="rId1"/>
+          <a:stretch>
+            <a:fillRect/>
+          </a:stretch>
+        </p:blipFill>
+        <p:spPr>
+          <a:xfrm>
+            <a:off x="7785684" y="128016"/>
+            <a:ext cx="201168" cy="201168"/>
+          </a:xfrm>
+          <a:prstGeom prst="rect">
+            <a:avLst/>
+          </a:prstGeom>
+        </p:spPr>
+      </p:pic>
+      <p:sp>
+        <p:nvSpPr>
+          <p:cNvPr id="15" name="Text 12"/>
+          <p:cNvSpPr txBox="1"/>
+          <p:nvPr/>
+        </p:nvSpPr>
+        <p:spPr>
+          <a:xfrm>
+            <a:off x="8041716" y="91440"/>
+            <a:ext cx="3564763" cy="274320"/>
+          </a:xfrm>
+          <a:prstGeom prst="rect">
+            <a:avLst/>
+          </a:prstGeom>
+          <a:noFill/>
+          <a:ln/>
+        </p:spPr>
+        <p:txBody>
+          <a:bodyPr wrap="square" lIns="0" tIns="0" rIns="0" bIns="0" rtlCol="0" anchor="ctr"/>
+          <a:lstStyle/>
+          <a:p>
+            <a:pPr indent="0" marL="0">
+              <a:buNone/>
+            </a:pPr>
+            <a:r>
+              <a:rPr lang="en-US" sz="1100" b="1" dirty="0">
+                <a:solidFill>
+                  <a:srgbClr val="075985"/>
+                </a:solidFill>
+                <a:latin typeface="Calibri" pitchFamily="34" charset="0"/>
+                <a:ea typeface="Calibri" pitchFamily="34" charset="-122"/>
+                <a:cs typeface="Calibri" pitchFamily="34" charset="-120"/>
+              </a:rPr>
+              <a:t>DA COMPRENDERE OGGI</a:t>
+            </a:r>
+            <a:pPr indent="0" marL="0">
+              <a:buNone/>
+            </a:pPr>
+            <a:r>
+              <a:rPr lang="en-US" sz="1100" dirty="0">
+                <a:solidFill>
+                  <a:srgbClr val="075985"/>
+                </a:solidFill>
+                <a:latin typeface="Calibri" pitchFamily="34" charset="0"/>
+                <a:ea typeface="Calibri" pitchFamily="34" charset="-122"/>
+                <a:cs typeface="Calibri" pitchFamily="34" charset="-120"/>
+              </a:rPr>
+              <a:t> · i registri a scorrimento</a:t>
+            </a:r>
+            <a:endParaRPr lang="en-US" sz="1100" dirty="0"/>
+          </a:p>
+        </p:txBody>
+      </p:sp>
+      <p:sp>
+        <p:nvSpPr>
           <p:cNvPr id="25" name="Slide Number Placeholder 0"/>
           <p:cNvSpPr>
             <a:spLocks noGrp="1"/>
@@ -7216,6 +8028,133 @@
       </p:sp>
       <p:sp>
         <p:nvSpPr>
+          <p:cNvPr id="56" name="Shape 54"/>
+          <p:cNvSpPr/>
+          <p:nvPr/>
+        </p:nvSpPr>
+        <p:spPr>
+          <a:xfrm>
+            <a:off x="7657668" y="91440"/>
+            <a:ext cx="3985387" cy="274320"/>
+          </a:xfrm>
+          <a:prstGeom prst="rect">
+            <a:avLst/>
+          </a:prstGeom>
+          <a:solidFill>
+            <a:srgbClr val="E0F2FE"/>
+          </a:solidFill>
+          <a:ln w="12700">
+            <a:solidFill>
+              <a:srgbClr val="0369A1"/>
+            </a:solidFill>
+            <a:prstDash val="solid"/>
+          </a:ln>
+        </p:spPr>
+      </p:sp>
+      <p:sp>
+        <p:nvSpPr>
+          <p:cNvPr id="57" name="Shape 55"/>
+          <p:cNvSpPr/>
+          <p:nvPr/>
+        </p:nvSpPr>
+        <p:spPr>
+          <a:xfrm>
+            <a:off x="7657668" y="91440"/>
+            <a:ext cx="73152" cy="274320"/>
+          </a:xfrm>
+          <a:prstGeom prst="rect">
+            <a:avLst/>
+          </a:prstGeom>
+          <a:solidFill>
+            <a:srgbClr val="0369A1"/>
+          </a:solidFill>
+          <a:ln w="12700">
+            <a:solidFill>
+              <a:srgbClr val="0369A1"/>
+            </a:solidFill>
+            <a:prstDash val="solid"/>
+          </a:ln>
+        </p:spPr>
+      </p:sp>
+      <p:pic>
+        <p:nvPicPr>
+          <p:cNvPr id="58" name="Image 0" descr="preencoded.png">    </p:cNvPr>
+          <p:cNvPicPr>
+            <a:picLocks noChangeAspect="1"/>
+          </p:cNvPicPr>
+          <p:nvPr/>
+        </p:nvPicPr>
+        <p:blipFill>
+          <a:blip r:embed="rId1"/>
+          <a:stretch>
+            <a:fillRect/>
+          </a:stretch>
+        </p:blipFill>
+        <p:spPr>
+          <a:xfrm>
+            <a:off x="7785684" y="128016"/>
+            <a:ext cx="201168" cy="201168"/>
+          </a:xfrm>
+          <a:prstGeom prst="rect">
+            <a:avLst/>
+          </a:prstGeom>
+        </p:spPr>
+      </p:pic>
+      <p:sp>
+        <p:nvSpPr>
+          <p:cNvPr id="59" name="Text 56"/>
+          <p:cNvSpPr txBox="1"/>
+          <p:nvPr/>
+        </p:nvSpPr>
+        <p:spPr>
+          <a:xfrm>
+            <a:off x="8041716" y="91440"/>
+            <a:ext cx="3564763" cy="274320"/>
+          </a:xfrm>
+          <a:prstGeom prst="rect">
+            <a:avLst/>
+          </a:prstGeom>
+          <a:noFill/>
+          <a:ln/>
+        </p:spPr>
+        <p:txBody>
+          <a:bodyPr wrap="square" lIns="0" tIns="0" rIns="0" bIns="0" rtlCol="0" anchor="ctr"/>
+          <a:lstStyle/>
+          <a:p>
+            <a:pPr indent="0" marL="0">
+              <a:buNone/>
+            </a:pPr>
+            <a:r>
+              <a:rPr lang="en-US" sz="1100" b="1" dirty="0">
+                <a:solidFill>
+                  <a:srgbClr val="075985"/>
+                </a:solidFill>
+                <a:latin typeface="Calibri" pitchFamily="34" charset="0"/>
+                <a:ea typeface="Calibri" pitchFamily="34" charset="-122"/>
+                <a:cs typeface="Calibri" pitchFamily="34" charset="-120"/>
+              </a:rPr>
+              <a:t>DA COMPRENDERE OGGI</a:t>
+            </a:r>
+            <a:pPr indent="0" marL="0">
+              <a:buNone/>
+            </a:pPr>
+            <a:r>
+              <a:rPr lang="en-US" sz="1100" dirty="0">
+                <a:solidFill>
+                  <a:srgbClr val="075985"/>
+                </a:solidFill>
+                <a:latin typeface="Calibri" pitchFamily="34" charset="0"/>
+                <a:ea typeface="Calibri" pitchFamily="34" charset="-122"/>
+                <a:cs typeface="Calibri" pitchFamily="34" charset="-120"/>
+              </a:rPr>
+              <a:t> · i registri a scorrimento</a:t>
+            </a:r>
+            <a:endParaRPr lang="en-US" sz="1100" dirty="0"/>
+          </a:p>
+        </p:txBody>
+      </p:sp>
+      <p:sp>
+        <p:nvSpPr>
           <p:cNvPr id="25" name="Slide Number Placeholder 0"/>
           <p:cNvSpPr>
             <a:spLocks noGrp="1"/>
@@ -7676,6 +8615,133 @@
       </p:sp>
       <p:sp>
         <p:nvSpPr>
+          <p:cNvPr id="12" name="Shape 10"/>
+          <p:cNvSpPr/>
+          <p:nvPr/>
+        </p:nvSpPr>
+        <p:spPr>
+          <a:xfrm>
+            <a:off x="7657668" y="91440"/>
+            <a:ext cx="3985387" cy="274320"/>
+          </a:xfrm>
+          <a:prstGeom prst="rect">
+            <a:avLst/>
+          </a:prstGeom>
+          <a:solidFill>
+            <a:srgbClr val="E0F2FE"/>
+          </a:solidFill>
+          <a:ln w="12700">
+            <a:solidFill>
+              <a:srgbClr val="0369A1"/>
+            </a:solidFill>
+            <a:prstDash val="solid"/>
+          </a:ln>
+        </p:spPr>
+      </p:sp>
+      <p:sp>
+        <p:nvSpPr>
+          <p:cNvPr id="13" name="Shape 11"/>
+          <p:cNvSpPr/>
+          <p:nvPr/>
+        </p:nvSpPr>
+        <p:spPr>
+          <a:xfrm>
+            <a:off x="7657668" y="91440"/>
+            <a:ext cx="73152" cy="274320"/>
+          </a:xfrm>
+          <a:prstGeom prst="rect">
+            <a:avLst/>
+          </a:prstGeom>
+          <a:solidFill>
+            <a:srgbClr val="0369A1"/>
+          </a:solidFill>
+          <a:ln w="12700">
+            <a:solidFill>
+              <a:srgbClr val="0369A1"/>
+            </a:solidFill>
+            <a:prstDash val="solid"/>
+          </a:ln>
+        </p:spPr>
+      </p:sp>
+      <p:pic>
+        <p:nvPicPr>
+          <p:cNvPr id="14" name="Image 0" descr="preencoded.png">    </p:cNvPr>
+          <p:cNvPicPr>
+            <a:picLocks noChangeAspect="1"/>
+          </p:cNvPicPr>
+          <p:nvPr/>
+        </p:nvPicPr>
+        <p:blipFill>
+          <a:blip r:embed="rId1"/>
+          <a:stretch>
+            <a:fillRect/>
+          </a:stretch>
+        </p:blipFill>
+        <p:spPr>
+          <a:xfrm>
+            <a:off x="7785684" y="128016"/>
+            <a:ext cx="201168" cy="201168"/>
+          </a:xfrm>
+          <a:prstGeom prst="rect">
+            <a:avLst/>
+          </a:prstGeom>
+        </p:spPr>
+      </p:pic>
+      <p:sp>
+        <p:nvSpPr>
+          <p:cNvPr id="15" name="Text 12"/>
+          <p:cNvSpPr txBox="1"/>
+          <p:nvPr/>
+        </p:nvSpPr>
+        <p:spPr>
+          <a:xfrm>
+            <a:off x="8041716" y="91440"/>
+            <a:ext cx="3564763" cy="274320"/>
+          </a:xfrm>
+          <a:prstGeom prst="rect">
+            <a:avLst/>
+          </a:prstGeom>
+          <a:noFill/>
+          <a:ln/>
+        </p:spPr>
+        <p:txBody>
+          <a:bodyPr wrap="square" lIns="0" tIns="0" rIns="0" bIns="0" rtlCol="0" anchor="ctr"/>
+          <a:lstStyle/>
+          <a:p>
+            <a:pPr indent="0" marL="0">
+              <a:buNone/>
+            </a:pPr>
+            <a:r>
+              <a:rPr lang="en-US" sz="1100" b="1" dirty="0">
+                <a:solidFill>
+                  <a:srgbClr val="075985"/>
+                </a:solidFill>
+                <a:latin typeface="Calibri" pitchFamily="34" charset="0"/>
+                <a:ea typeface="Calibri" pitchFamily="34" charset="-122"/>
+                <a:cs typeface="Calibri" pitchFamily="34" charset="-120"/>
+              </a:rPr>
+              <a:t>DA COMPRENDERE OGGI</a:t>
+            </a:r>
+            <a:pPr indent="0" marL="0">
+              <a:buNone/>
+            </a:pPr>
+            <a:r>
+              <a:rPr lang="en-US" sz="1100" dirty="0">
+                <a:solidFill>
+                  <a:srgbClr val="075985"/>
+                </a:solidFill>
+                <a:latin typeface="Calibri" pitchFamily="34" charset="0"/>
+                <a:ea typeface="Calibri" pitchFamily="34" charset="-122"/>
+                <a:cs typeface="Calibri" pitchFamily="34" charset="-120"/>
+              </a:rPr>
+              <a:t> · i registri a scorrimento</a:t>
+            </a:r>
+            <a:endParaRPr lang="en-US" sz="1100" dirty="0"/>
+          </a:p>
+        </p:txBody>
+      </p:sp>
+      <p:sp>
+        <p:nvSpPr>
           <p:cNvPr id="25" name="Slide Number Placeholder 0"/>
           <p:cNvSpPr>
             <a:spLocks noGrp="1"/>
@@ -8521,6 +9587,133 @@
       </p:sp>
       <p:sp>
         <p:nvSpPr>
+          <p:cNvPr id="24" name="Shape 22"/>
+          <p:cNvSpPr/>
+          <p:nvPr/>
+        </p:nvSpPr>
+        <p:spPr>
+          <a:xfrm>
+            <a:off x="7657668" y="91440"/>
+            <a:ext cx="3985387" cy="274320"/>
+          </a:xfrm>
+          <a:prstGeom prst="rect">
+            <a:avLst/>
+          </a:prstGeom>
+          <a:solidFill>
+            <a:srgbClr val="E0F2FE"/>
+          </a:solidFill>
+          <a:ln w="12700">
+            <a:solidFill>
+              <a:srgbClr val="0369A1"/>
+            </a:solidFill>
+            <a:prstDash val="solid"/>
+          </a:ln>
+        </p:spPr>
+      </p:sp>
+      <p:sp>
+        <p:nvSpPr>
+          <p:cNvPr id="25" name="Shape 23"/>
+          <p:cNvSpPr/>
+          <p:nvPr/>
+        </p:nvSpPr>
+        <p:spPr>
+          <a:xfrm>
+            <a:off x="7657668" y="91440"/>
+            <a:ext cx="73152" cy="274320"/>
+          </a:xfrm>
+          <a:prstGeom prst="rect">
+            <a:avLst/>
+          </a:prstGeom>
+          <a:solidFill>
+            <a:srgbClr val="0369A1"/>
+          </a:solidFill>
+          <a:ln w="12700">
+            <a:solidFill>
+              <a:srgbClr val="0369A1"/>
+            </a:solidFill>
+            <a:prstDash val="solid"/>
+          </a:ln>
+        </p:spPr>
+      </p:sp>
+      <p:pic>
+        <p:nvPicPr>
+          <p:cNvPr id="26" name="Image 0" descr="preencoded.png">    </p:cNvPr>
+          <p:cNvPicPr>
+            <a:picLocks noChangeAspect="1"/>
+          </p:cNvPicPr>
+          <p:nvPr/>
+        </p:nvPicPr>
+        <p:blipFill>
+          <a:blip r:embed="rId1"/>
+          <a:stretch>
+            <a:fillRect/>
+          </a:stretch>
+        </p:blipFill>
+        <p:spPr>
+          <a:xfrm>
+            <a:off x="7785684" y="128016"/>
+            <a:ext cx="201168" cy="201168"/>
+          </a:xfrm>
+          <a:prstGeom prst="rect">
+            <a:avLst/>
+          </a:prstGeom>
+        </p:spPr>
+      </p:pic>
+      <p:sp>
+        <p:nvSpPr>
+          <p:cNvPr id="27" name="Text 24"/>
+          <p:cNvSpPr txBox="1"/>
+          <p:nvPr/>
+        </p:nvSpPr>
+        <p:spPr>
+          <a:xfrm>
+            <a:off x="8041716" y="91440"/>
+            <a:ext cx="3564763" cy="274320"/>
+          </a:xfrm>
+          <a:prstGeom prst="rect">
+            <a:avLst/>
+          </a:prstGeom>
+          <a:noFill/>
+          <a:ln/>
+        </p:spPr>
+        <p:txBody>
+          <a:bodyPr wrap="square" lIns="0" tIns="0" rIns="0" bIns="0" rtlCol="0" anchor="ctr"/>
+          <a:lstStyle/>
+          <a:p>
+            <a:pPr indent="0" marL="0">
+              <a:buNone/>
+            </a:pPr>
+            <a:r>
+              <a:rPr lang="en-US" sz="1100" b="1" dirty="0">
+                <a:solidFill>
+                  <a:srgbClr val="075985"/>
+                </a:solidFill>
+                <a:latin typeface="Calibri" pitchFamily="34" charset="0"/>
+                <a:ea typeface="Calibri" pitchFamily="34" charset="-122"/>
+                <a:cs typeface="Calibri" pitchFamily="34" charset="-120"/>
+              </a:rPr>
+              <a:t>DA COMPRENDERE OGGI</a:t>
+            </a:r>
+            <a:pPr indent="0" marL="0">
+              <a:buNone/>
+            </a:pPr>
+            <a:r>
+              <a:rPr lang="en-US" sz="1100" dirty="0">
+                <a:solidFill>
+                  <a:srgbClr val="075985"/>
+                </a:solidFill>
+                <a:latin typeface="Calibri" pitchFamily="34" charset="0"/>
+                <a:ea typeface="Calibri" pitchFamily="34" charset="-122"/>
+                <a:cs typeface="Calibri" pitchFamily="34" charset="-120"/>
+              </a:rPr>
+              <a:t> · i registri a scorrimento</a:t>
+            </a:r>
+            <a:endParaRPr lang="en-US" sz="1100" dirty="0"/>
+          </a:p>
+        </p:txBody>
+      </p:sp>
+      <p:sp>
+        <p:nvSpPr>
           <p:cNvPr id="25" name="Slide Number Placeholder 0"/>
           <p:cNvSpPr>
             <a:spLocks noGrp="1"/>
@@ -9601,6 +10794,324 @@
               <a:t>Tutto ciò che contiene viene dalle Lezioni 11, 13 e da questa</a:t>
             </a:r>
             <a:endParaRPr lang="en-US" sz="1800" dirty="0"/>
+          </a:p>
+        </p:txBody>
+      </p:sp>
+      <p:sp>
+        <p:nvSpPr>
+          <p:cNvPr id="29" name="Shape 27"/>
+          <p:cNvSpPr/>
+          <p:nvPr/>
+        </p:nvSpPr>
+        <p:spPr>
+          <a:xfrm>
+            <a:off x="6503746" y="91440"/>
+            <a:ext cx="5139309" cy="274320"/>
+          </a:xfrm>
+          <a:prstGeom prst="rect">
+            <a:avLst/>
+          </a:prstGeom>
+          <a:solidFill>
+            <a:srgbClr val="F3E8FF"/>
+          </a:solidFill>
+          <a:ln w="12700">
+            <a:solidFill>
+              <a:srgbClr val="7E22CE"/>
+            </a:solidFill>
+            <a:prstDash val="dash"/>
+          </a:ln>
+        </p:spPr>
+      </p:sp>
+      <p:sp>
+        <p:nvSpPr>
+          <p:cNvPr id="30" name="Shape 28"/>
+          <p:cNvSpPr/>
+          <p:nvPr/>
+        </p:nvSpPr>
+        <p:spPr>
+          <a:xfrm>
+            <a:off x="6531178" y="128016"/>
+            <a:ext cx="45720" cy="45720"/>
+          </a:xfrm>
+          <a:prstGeom prst="rect">
+            <a:avLst/>
+          </a:prstGeom>
+          <a:solidFill>
+            <a:srgbClr val="7E22CE"/>
+          </a:solidFill>
+          <a:ln w="12700">
+            <a:solidFill>
+              <a:srgbClr val="7E22CE"/>
+            </a:solidFill>
+            <a:prstDash val="solid"/>
+          </a:ln>
+        </p:spPr>
+      </p:sp>
+      <p:sp>
+        <p:nvSpPr>
+          <p:cNvPr id="31" name="Shape 29"/>
+          <p:cNvSpPr/>
+          <p:nvPr/>
+        </p:nvSpPr>
+        <p:spPr>
+          <a:xfrm>
+            <a:off x="6531178" y="205740"/>
+            <a:ext cx="45720" cy="45720"/>
+          </a:xfrm>
+          <a:prstGeom prst="rect">
+            <a:avLst/>
+          </a:prstGeom>
+          <a:solidFill>
+            <a:srgbClr val="7E22CE"/>
+          </a:solidFill>
+          <a:ln w="12700">
+            <a:solidFill>
+              <a:srgbClr val="7E22CE"/>
+            </a:solidFill>
+            <a:prstDash val="solid"/>
+          </a:ln>
+        </p:spPr>
+      </p:sp>
+      <p:sp>
+        <p:nvSpPr>
+          <p:cNvPr id="32" name="Shape 30"/>
+          <p:cNvSpPr/>
+          <p:nvPr/>
+        </p:nvSpPr>
+        <p:spPr>
+          <a:xfrm>
+            <a:off x="6531178" y="283464"/>
+            <a:ext cx="45720" cy="45720"/>
+          </a:xfrm>
+          <a:prstGeom prst="rect">
+            <a:avLst/>
+          </a:prstGeom>
+          <a:solidFill>
+            <a:srgbClr val="7E22CE"/>
+          </a:solidFill>
+          <a:ln w="12700">
+            <a:solidFill>
+              <a:srgbClr val="7E22CE"/>
+            </a:solidFill>
+            <a:prstDash val="solid"/>
+          </a:ln>
+        </p:spPr>
+      </p:sp>
+      <p:pic>
+        <p:nvPicPr>
+          <p:cNvPr id="33" name="Image 0" descr="preencoded.png">    </p:cNvPr>
+          <p:cNvPicPr>
+            <a:picLocks noChangeAspect="1"/>
+          </p:cNvPicPr>
+          <p:nvPr/>
+        </p:nvPicPr>
+        <p:blipFill>
+          <a:blip r:embed="rId1"/>
+          <a:stretch>
+            <a:fillRect/>
+          </a:stretch>
+        </p:blipFill>
+        <p:spPr>
+          <a:xfrm>
+            <a:off x="6631762" y="128016"/>
+            <a:ext cx="201168" cy="201168"/>
+          </a:xfrm>
+          <a:prstGeom prst="rect">
+            <a:avLst/>
+          </a:prstGeom>
+        </p:spPr>
+      </p:pic>
+      <p:sp>
+        <p:nvSpPr>
+          <p:cNvPr id="34" name="Text 31"/>
+          <p:cNvSpPr txBox="1"/>
+          <p:nvPr/>
+        </p:nvSpPr>
+        <p:spPr>
+          <a:xfrm>
+            <a:off x="6887794" y="91440"/>
+            <a:ext cx="4718685" cy="274320"/>
+          </a:xfrm>
+          <a:prstGeom prst="rect">
+            <a:avLst/>
+          </a:prstGeom>
+          <a:noFill/>
+          <a:ln/>
+        </p:spPr>
+        <p:txBody>
+          <a:bodyPr wrap="square" lIns="0" tIns="0" rIns="0" bIns="0" rtlCol="0" anchor="ctr"/>
+          <a:lstStyle/>
+          <a:p>
+            <a:pPr indent="0" marL="0">
+              <a:buNone/>
+            </a:pPr>
+            <a:r>
+              <a:rPr lang="en-US" sz="1100" b="1" dirty="0">
+                <a:solidFill>
+                  <a:srgbClr val="6B21A8"/>
+                </a:solidFill>
+                <a:latin typeface="Calibri" pitchFamily="34" charset="0"/>
+                <a:ea typeface="Calibri" pitchFamily="34" charset="-122"/>
+                <a:cs typeface="Calibri" pitchFamily="34" charset="-120"/>
+              </a:rPr>
+              <a:t>DA COMPRENDERE PIÙ AVANTI</a:t>
+            </a:r>
+            <a:pPr indent="0" marL="0">
+              <a:buNone/>
+            </a:pPr>
+            <a:r>
+              <a:rPr lang="en-US" sz="1100" dirty="0">
+                <a:solidFill>
+                  <a:srgbClr val="6B21A8"/>
+                </a:solidFill>
+                <a:latin typeface="Calibri" pitchFamily="34" charset="0"/>
+                <a:ea typeface="Calibri" pitchFamily="34" charset="-122"/>
+                <a:cs typeface="Calibri" pitchFamily="34" charset="-120"/>
+              </a:rPr>
+              <a:t> · memorie e indirizzi</a:t>
+            </a:r>
+            <a:pPr indent="0" marL="0">
+              <a:buNone/>
+            </a:pPr>
+            <a:r>
+              <a:rPr lang="en-US" sz="1100" b="1" dirty="0">
+                <a:solidFill>
+                  <a:srgbClr val="6B21A8"/>
+                </a:solidFill>
+                <a:latin typeface="Calibri" pitchFamily="34" charset="0"/>
+                <a:ea typeface="Calibri" pitchFamily="34" charset="-122"/>
+                <a:cs typeface="Calibri" pitchFamily="34" charset="-120"/>
+              </a:rPr>
+              <a:t> → Lezione 15</a:t>
+            </a:r>
+            <a:endParaRPr lang="en-US" sz="1100" dirty="0"/>
+          </a:p>
+        </p:txBody>
+      </p:sp>
+      <p:sp>
+        <p:nvSpPr>
+          <p:cNvPr id="35" name="Shape 32"/>
+          <p:cNvSpPr/>
+          <p:nvPr/>
+        </p:nvSpPr>
+        <p:spPr>
+          <a:xfrm>
+            <a:off x="2342972" y="91440"/>
+            <a:ext cx="4051046" cy="274320"/>
+          </a:xfrm>
+          <a:prstGeom prst="rect">
+            <a:avLst/>
+          </a:prstGeom>
+          <a:solidFill>
+            <a:srgbClr val="E0F2FE"/>
+          </a:solidFill>
+          <a:ln w="12700">
+            <a:solidFill>
+              <a:srgbClr val="0369A1"/>
+            </a:solidFill>
+            <a:prstDash val="solid"/>
+          </a:ln>
+        </p:spPr>
+      </p:sp>
+      <p:sp>
+        <p:nvSpPr>
+          <p:cNvPr id="36" name="Shape 33"/>
+          <p:cNvSpPr/>
+          <p:nvPr/>
+        </p:nvSpPr>
+        <p:spPr>
+          <a:xfrm>
+            <a:off x="2342972" y="91440"/>
+            <a:ext cx="73152" cy="274320"/>
+          </a:xfrm>
+          <a:prstGeom prst="rect">
+            <a:avLst/>
+          </a:prstGeom>
+          <a:solidFill>
+            <a:srgbClr val="0369A1"/>
+          </a:solidFill>
+          <a:ln w="12700">
+            <a:solidFill>
+              <a:srgbClr val="0369A1"/>
+            </a:solidFill>
+            <a:prstDash val="solid"/>
+          </a:ln>
+        </p:spPr>
+      </p:sp>
+      <p:pic>
+        <p:nvPicPr>
+          <p:cNvPr id="37" name="Image 1" descr="preencoded.png">    </p:cNvPr>
+          <p:cNvPicPr>
+            <a:picLocks noChangeAspect="1"/>
+          </p:cNvPicPr>
+          <p:nvPr/>
+        </p:nvPicPr>
+        <p:blipFill>
+          <a:blip r:embed="rId2"/>
+          <a:stretch>
+            <a:fillRect/>
+          </a:stretch>
+        </p:blipFill>
+        <p:spPr>
+          <a:xfrm>
+            <a:off x="2470988" y="128016"/>
+            <a:ext cx="201168" cy="201168"/>
+          </a:xfrm>
+          <a:prstGeom prst="rect">
+            <a:avLst/>
+          </a:prstGeom>
+        </p:spPr>
+      </p:pic>
+      <p:sp>
+        <p:nvSpPr>
+          <p:cNvPr id="38" name="Text 34"/>
+          <p:cNvSpPr txBox="1"/>
+          <p:nvPr/>
+        </p:nvSpPr>
+        <p:spPr>
+          <a:xfrm>
+            <a:off x="2727020" y="91440"/>
+            <a:ext cx="3630422" cy="274320"/>
+          </a:xfrm>
+          <a:prstGeom prst="rect">
+            <a:avLst/>
+          </a:prstGeom>
+          <a:noFill/>
+          <a:ln/>
+        </p:spPr>
+        <p:txBody>
+          <a:bodyPr wrap="square" lIns="0" tIns="0" rIns="0" bIns="0" rtlCol="0" anchor="ctr"/>
+          <a:lstStyle/>
+          <a:p>
+            <a:pPr indent="0" marL="0">
+              <a:buNone/>
+            </a:pPr>
+            <a:r>
+              <a:rPr lang="en-US" sz="1100" b="1" dirty="0">
+                <a:solidFill>
+                  <a:srgbClr val="075985"/>
+                </a:solidFill>
+                <a:latin typeface="Calibri" pitchFamily="34" charset="0"/>
+                <a:ea typeface="Calibri" pitchFamily="34" charset="-122"/>
+                <a:cs typeface="Calibri" pitchFamily="34" charset="-120"/>
+              </a:rPr>
+              <a:t>DA COMPRENDERE OGGI</a:t>
+            </a:r>
+            <a:pPr indent="0" marL="0">
+              <a:buNone/>
+            </a:pPr>
+            <a:r>
+              <a:rPr lang="en-US" sz="1100" dirty="0">
+                <a:solidFill>
+                  <a:srgbClr val="075985"/>
+                </a:solidFill>
+                <a:latin typeface="Calibri" pitchFamily="34" charset="0"/>
+                <a:ea typeface="Calibri" pitchFamily="34" charset="-122"/>
+                <a:cs typeface="Calibri" pitchFamily="34" charset="-120"/>
+              </a:rPr>
+              <a:t> · i registri come flip-flop</a:t>
+            </a:r>
+            <a:endParaRPr lang="en-US" sz="1100" dirty="0"/>
           </a:p>
         </p:txBody>
       </p:sp>
@@ -14900,6 +16411,133 @@
       </p:sp>
       <p:sp>
         <p:nvSpPr>
+          <p:cNvPr id="16" name="Shape 14"/>
+          <p:cNvSpPr/>
+          <p:nvPr/>
+        </p:nvSpPr>
+        <p:spPr>
+          <a:xfrm>
+            <a:off x="7592009" y="91440"/>
+            <a:ext cx="4051046" cy="274320"/>
+          </a:xfrm>
+          <a:prstGeom prst="rect">
+            <a:avLst/>
+          </a:prstGeom>
+          <a:solidFill>
+            <a:srgbClr val="E0F2FE"/>
+          </a:solidFill>
+          <a:ln w="12700">
+            <a:solidFill>
+              <a:srgbClr val="0369A1"/>
+            </a:solidFill>
+            <a:prstDash val="solid"/>
+          </a:ln>
+        </p:spPr>
+      </p:sp>
+      <p:sp>
+        <p:nvSpPr>
+          <p:cNvPr id="17" name="Shape 15"/>
+          <p:cNvSpPr/>
+          <p:nvPr/>
+        </p:nvSpPr>
+        <p:spPr>
+          <a:xfrm>
+            <a:off x="7592009" y="91440"/>
+            <a:ext cx="73152" cy="274320"/>
+          </a:xfrm>
+          <a:prstGeom prst="rect">
+            <a:avLst/>
+          </a:prstGeom>
+          <a:solidFill>
+            <a:srgbClr val="0369A1"/>
+          </a:solidFill>
+          <a:ln w="12700">
+            <a:solidFill>
+              <a:srgbClr val="0369A1"/>
+            </a:solidFill>
+            <a:prstDash val="solid"/>
+          </a:ln>
+        </p:spPr>
+      </p:sp>
+      <p:pic>
+        <p:nvPicPr>
+          <p:cNvPr id="18" name="Image 0" descr="preencoded.png">    </p:cNvPr>
+          <p:cNvPicPr>
+            <a:picLocks noChangeAspect="1"/>
+          </p:cNvPicPr>
+          <p:nvPr/>
+        </p:nvPicPr>
+        <p:blipFill>
+          <a:blip r:embed="rId1"/>
+          <a:stretch>
+            <a:fillRect/>
+          </a:stretch>
+        </p:blipFill>
+        <p:spPr>
+          <a:xfrm>
+            <a:off x="7720025" y="128016"/>
+            <a:ext cx="201168" cy="201168"/>
+          </a:xfrm>
+          <a:prstGeom prst="rect">
+            <a:avLst/>
+          </a:prstGeom>
+        </p:spPr>
+      </p:pic>
+      <p:sp>
+        <p:nvSpPr>
+          <p:cNvPr id="19" name="Text 16"/>
+          <p:cNvSpPr txBox="1"/>
+          <p:nvPr/>
+        </p:nvSpPr>
+        <p:spPr>
+          <a:xfrm>
+            <a:off x="7976057" y="91440"/>
+            <a:ext cx="3630422" cy="274320"/>
+          </a:xfrm>
+          <a:prstGeom prst="rect">
+            <a:avLst/>
+          </a:prstGeom>
+          <a:noFill/>
+          <a:ln/>
+        </p:spPr>
+        <p:txBody>
+          <a:bodyPr wrap="square" lIns="0" tIns="0" rIns="0" bIns="0" rtlCol="0" anchor="ctr"/>
+          <a:lstStyle/>
+          <a:p>
+            <a:pPr indent="0" marL="0">
+              <a:buNone/>
+            </a:pPr>
+            <a:r>
+              <a:rPr lang="en-US" sz="1100" b="1" dirty="0">
+                <a:solidFill>
+                  <a:srgbClr val="075985"/>
+                </a:solidFill>
+                <a:latin typeface="Calibri" pitchFamily="34" charset="0"/>
+                <a:ea typeface="Calibri" pitchFamily="34" charset="-122"/>
+                <a:cs typeface="Calibri" pitchFamily="34" charset="-120"/>
+              </a:rPr>
+              <a:t>DA COMPRENDERE OGGI</a:t>
+            </a:r>
+            <a:pPr indent="0" marL="0">
+              <a:buNone/>
+            </a:pPr>
+            <a:r>
+              <a:rPr lang="en-US" sz="1100" dirty="0">
+                <a:solidFill>
+                  <a:srgbClr val="075985"/>
+                </a:solidFill>
+                <a:latin typeface="Calibri" pitchFamily="34" charset="0"/>
+                <a:ea typeface="Calibri" pitchFamily="34" charset="-122"/>
+                <a:cs typeface="Calibri" pitchFamily="34" charset="-120"/>
+              </a:rPr>
+              <a:t> · i registri come flip-flop</a:t>
+            </a:r>
+            <a:endParaRPr lang="en-US" sz="1100" dirty="0"/>
+          </a:p>
+        </p:txBody>
+      </p:sp>
+      <p:sp>
+        <p:nvSpPr>
           <p:cNvPr id="25" name="Slide Number Placeholder 0"/>
           <p:cNvSpPr>
             <a:spLocks noGrp="1"/>
@@ -15432,6 +17070,133 @@
       </p:sp>
       <p:sp>
         <p:nvSpPr>
+          <p:cNvPr id="15" name="Shape 12"/>
+          <p:cNvSpPr/>
+          <p:nvPr/>
+        </p:nvSpPr>
+        <p:spPr>
+          <a:xfrm>
+            <a:off x="7592009" y="91440"/>
+            <a:ext cx="4051046" cy="274320"/>
+          </a:xfrm>
+          <a:prstGeom prst="rect">
+            <a:avLst/>
+          </a:prstGeom>
+          <a:solidFill>
+            <a:srgbClr val="E0F2FE"/>
+          </a:solidFill>
+          <a:ln w="12700">
+            <a:solidFill>
+              <a:srgbClr val="0369A1"/>
+            </a:solidFill>
+            <a:prstDash val="solid"/>
+          </a:ln>
+        </p:spPr>
+      </p:sp>
+      <p:sp>
+        <p:nvSpPr>
+          <p:cNvPr id="16" name="Shape 13"/>
+          <p:cNvSpPr/>
+          <p:nvPr/>
+        </p:nvSpPr>
+        <p:spPr>
+          <a:xfrm>
+            <a:off x="7592009" y="91440"/>
+            <a:ext cx="73152" cy="274320"/>
+          </a:xfrm>
+          <a:prstGeom prst="rect">
+            <a:avLst/>
+          </a:prstGeom>
+          <a:solidFill>
+            <a:srgbClr val="0369A1"/>
+          </a:solidFill>
+          <a:ln w="12700">
+            <a:solidFill>
+              <a:srgbClr val="0369A1"/>
+            </a:solidFill>
+            <a:prstDash val="solid"/>
+          </a:ln>
+        </p:spPr>
+      </p:sp>
+      <p:pic>
+        <p:nvPicPr>
+          <p:cNvPr id="17" name="Image 1" descr="preencoded.png">    </p:cNvPr>
+          <p:cNvPicPr>
+            <a:picLocks noChangeAspect="1"/>
+          </p:cNvPicPr>
+          <p:nvPr/>
+        </p:nvPicPr>
+        <p:blipFill>
+          <a:blip r:embed="rId2"/>
+          <a:stretch>
+            <a:fillRect/>
+          </a:stretch>
+        </p:blipFill>
+        <p:spPr>
+          <a:xfrm>
+            <a:off x="7720025" y="128016"/>
+            <a:ext cx="201168" cy="201168"/>
+          </a:xfrm>
+          <a:prstGeom prst="rect">
+            <a:avLst/>
+          </a:prstGeom>
+        </p:spPr>
+      </p:pic>
+      <p:sp>
+        <p:nvSpPr>
+          <p:cNvPr id="18" name="Text 14"/>
+          <p:cNvSpPr txBox="1"/>
+          <p:nvPr/>
+        </p:nvSpPr>
+        <p:spPr>
+          <a:xfrm>
+            <a:off x="7976057" y="91440"/>
+            <a:ext cx="3630422" cy="274320"/>
+          </a:xfrm>
+          <a:prstGeom prst="rect">
+            <a:avLst/>
+          </a:prstGeom>
+          <a:noFill/>
+          <a:ln/>
+        </p:spPr>
+        <p:txBody>
+          <a:bodyPr wrap="square" lIns="0" tIns="0" rIns="0" bIns="0" rtlCol="0" anchor="ctr"/>
+          <a:lstStyle/>
+          <a:p>
+            <a:pPr indent="0" marL="0">
+              <a:buNone/>
+            </a:pPr>
+            <a:r>
+              <a:rPr lang="en-US" sz="1100" b="1" dirty="0">
+                <a:solidFill>
+                  <a:srgbClr val="075985"/>
+                </a:solidFill>
+                <a:latin typeface="Calibri" pitchFamily="34" charset="0"/>
+                <a:ea typeface="Calibri" pitchFamily="34" charset="-122"/>
+                <a:cs typeface="Calibri" pitchFamily="34" charset="-120"/>
+              </a:rPr>
+              <a:t>DA COMPRENDERE OGGI</a:t>
+            </a:r>
+            <a:pPr indent="0" marL="0">
+              <a:buNone/>
+            </a:pPr>
+            <a:r>
+              <a:rPr lang="en-US" sz="1100" dirty="0">
+                <a:solidFill>
+                  <a:srgbClr val="075985"/>
+                </a:solidFill>
+                <a:latin typeface="Calibri" pitchFamily="34" charset="0"/>
+                <a:ea typeface="Calibri" pitchFamily="34" charset="-122"/>
+                <a:cs typeface="Calibri" pitchFamily="34" charset="-120"/>
+              </a:rPr>
+              <a:t> · i registri come flip-flop</a:t>
+            </a:r>
+            <a:endParaRPr lang="en-US" sz="1100" dirty="0"/>
+          </a:p>
+        </p:txBody>
+      </p:sp>
+      <p:sp>
+        <p:nvSpPr>
           <p:cNvPr id="25" name="Slide Number Placeholder 0"/>
           <p:cNvSpPr>
             <a:spLocks noGrp="1"/>
@@ -15852,6 +17617,133 @@
       </p:sp>
       <p:sp>
         <p:nvSpPr>
+          <p:cNvPr id="12" name="Shape 10"/>
+          <p:cNvSpPr/>
+          <p:nvPr/>
+        </p:nvSpPr>
+        <p:spPr>
+          <a:xfrm>
+            <a:off x="7723327" y="91440"/>
+            <a:ext cx="3919728" cy="274320"/>
+          </a:xfrm>
+          <a:prstGeom prst="rect">
+            <a:avLst/>
+          </a:prstGeom>
+          <a:solidFill>
+            <a:srgbClr val="E0F2FE"/>
+          </a:solidFill>
+          <a:ln w="12700">
+            <a:solidFill>
+              <a:srgbClr val="0369A1"/>
+            </a:solidFill>
+            <a:prstDash val="solid"/>
+          </a:ln>
+        </p:spPr>
+      </p:sp>
+      <p:sp>
+        <p:nvSpPr>
+          <p:cNvPr id="13" name="Shape 11"/>
+          <p:cNvSpPr/>
+          <p:nvPr/>
+        </p:nvSpPr>
+        <p:spPr>
+          <a:xfrm>
+            <a:off x="7723327" y="91440"/>
+            <a:ext cx="73152" cy="274320"/>
+          </a:xfrm>
+          <a:prstGeom prst="rect">
+            <a:avLst/>
+          </a:prstGeom>
+          <a:solidFill>
+            <a:srgbClr val="0369A1"/>
+          </a:solidFill>
+          <a:ln w="12700">
+            <a:solidFill>
+              <a:srgbClr val="0369A1"/>
+            </a:solidFill>
+            <a:prstDash val="solid"/>
+          </a:ln>
+        </p:spPr>
+      </p:sp>
+      <p:pic>
+        <p:nvPicPr>
+          <p:cNvPr id="14" name="Image 0" descr="preencoded.png">    </p:cNvPr>
+          <p:cNvPicPr>
+            <a:picLocks noChangeAspect="1"/>
+          </p:cNvPicPr>
+          <p:nvPr/>
+        </p:nvPicPr>
+        <p:blipFill>
+          <a:blip r:embed="rId1"/>
+          <a:stretch>
+            <a:fillRect/>
+          </a:stretch>
+        </p:blipFill>
+        <p:spPr>
+          <a:xfrm>
+            <a:off x="7851343" y="128016"/>
+            <a:ext cx="201168" cy="201168"/>
+          </a:xfrm>
+          <a:prstGeom prst="rect">
+            <a:avLst/>
+          </a:prstGeom>
+        </p:spPr>
+      </p:pic>
+      <p:sp>
+        <p:nvSpPr>
+          <p:cNvPr id="15" name="Text 12"/>
+          <p:cNvSpPr txBox="1"/>
+          <p:nvPr/>
+        </p:nvSpPr>
+        <p:spPr>
+          <a:xfrm>
+            <a:off x="8107375" y="91440"/>
+            <a:ext cx="3499104" cy="274320"/>
+          </a:xfrm>
+          <a:prstGeom prst="rect">
+            <a:avLst/>
+          </a:prstGeom>
+          <a:noFill/>
+          <a:ln/>
+        </p:spPr>
+        <p:txBody>
+          <a:bodyPr wrap="square" lIns="0" tIns="0" rIns="0" bIns="0" rtlCol="0" anchor="ctr"/>
+          <a:lstStyle/>
+          <a:p>
+            <a:pPr indent="0" marL="0">
+              <a:buNone/>
+            </a:pPr>
+            <a:r>
+              <a:rPr lang="en-US" sz="1100" b="1" dirty="0">
+                <a:solidFill>
+                  <a:srgbClr val="075985"/>
+                </a:solidFill>
+                <a:latin typeface="Calibri" pitchFamily="34" charset="0"/>
+                <a:ea typeface="Calibri" pitchFamily="34" charset="-122"/>
+                <a:cs typeface="Calibri" pitchFamily="34" charset="-120"/>
+              </a:rPr>
+              <a:t>DA COMPRENDERE OGGI</a:t>
+            </a:r>
+            <a:pPr indent="0" marL="0">
+              <a:buNone/>
+            </a:pPr>
+            <a:r>
+              <a:rPr lang="en-US" sz="1100" dirty="0">
+                <a:solidFill>
+                  <a:srgbClr val="075985"/>
+                </a:solidFill>
+                <a:latin typeface="Calibri" pitchFamily="34" charset="0"/>
+                <a:ea typeface="Calibri" pitchFamily="34" charset="-122"/>
+                <a:cs typeface="Calibri" pitchFamily="34" charset="-120"/>
+              </a:rPr>
+              <a:t> · bus e porte three-state</a:t>
+            </a:r>
+            <a:endParaRPr lang="en-US" sz="1100" dirty="0"/>
+          </a:p>
+        </p:txBody>
+      </p:sp>
+      <p:sp>
+        <p:nvSpPr>
           <p:cNvPr id="25" name="Slide Number Placeholder 0"/>
           <p:cNvSpPr>
             <a:spLocks noGrp="1"/>
@@ -16305,6 +18197,133 @@
       </p:sp>
       <p:sp>
         <p:nvSpPr>
+          <p:cNvPr id="9" name="Shape 7"/>
+          <p:cNvSpPr/>
+          <p:nvPr/>
+        </p:nvSpPr>
+        <p:spPr>
+          <a:xfrm>
+            <a:off x="7723327" y="91440"/>
+            <a:ext cx="3919728" cy="274320"/>
+          </a:xfrm>
+          <a:prstGeom prst="rect">
+            <a:avLst/>
+          </a:prstGeom>
+          <a:solidFill>
+            <a:srgbClr val="E0F2FE"/>
+          </a:solidFill>
+          <a:ln w="12700">
+            <a:solidFill>
+              <a:srgbClr val="0369A1"/>
+            </a:solidFill>
+            <a:prstDash val="solid"/>
+          </a:ln>
+        </p:spPr>
+      </p:sp>
+      <p:sp>
+        <p:nvSpPr>
+          <p:cNvPr id="10" name="Shape 8"/>
+          <p:cNvSpPr/>
+          <p:nvPr/>
+        </p:nvSpPr>
+        <p:spPr>
+          <a:xfrm>
+            <a:off x="7723327" y="91440"/>
+            <a:ext cx="73152" cy="274320"/>
+          </a:xfrm>
+          <a:prstGeom prst="rect">
+            <a:avLst/>
+          </a:prstGeom>
+          <a:solidFill>
+            <a:srgbClr val="0369A1"/>
+          </a:solidFill>
+          <a:ln w="12700">
+            <a:solidFill>
+              <a:srgbClr val="0369A1"/>
+            </a:solidFill>
+            <a:prstDash val="solid"/>
+          </a:ln>
+        </p:spPr>
+      </p:sp>
+      <p:pic>
+        <p:nvPicPr>
+          <p:cNvPr id="11" name="Image 0" descr="preencoded.png">    </p:cNvPr>
+          <p:cNvPicPr>
+            <a:picLocks noChangeAspect="1"/>
+          </p:cNvPicPr>
+          <p:nvPr/>
+        </p:nvPicPr>
+        <p:blipFill>
+          <a:blip r:embed="rId1"/>
+          <a:stretch>
+            <a:fillRect/>
+          </a:stretch>
+        </p:blipFill>
+        <p:spPr>
+          <a:xfrm>
+            <a:off x="7851343" y="128016"/>
+            <a:ext cx="201168" cy="201168"/>
+          </a:xfrm>
+          <a:prstGeom prst="rect">
+            <a:avLst/>
+          </a:prstGeom>
+        </p:spPr>
+      </p:pic>
+      <p:sp>
+        <p:nvSpPr>
+          <p:cNvPr id="12" name="Text 9"/>
+          <p:cNvSpPr txBox="1"/>
+          <p:nvPr/>
+        </p:nvSpPr>
+        <p:spPr>
+          <a:xfrm>
+            <a:off x="8107375" y="91440"/>
+            <a:ext cx="3499104" cy="274320"/>
+          </a:xfrm>
+          <a:prstGeom prst="rect">
+            <a:avLst/>
+          </a:prstGeom>
+          <a:noFill/>
+          <a:ln/>
+        </p:spPr>
+        <p:txBody>
+          <a:bodyPr wrap="square" lIns="0" tIns="0" rIns="0" bIns="0" rtlCol="0" anchor="ctr"/>
+          <a:lstStyle/>
+          <a:p>
+            <a:pPr indent="0" marL="0">
+              <a:buNone/>
+            </a:pPr>
+            <a:r>
+              <a:rPr lang="en-US" sz="1100" b="1" dirty="0">
+                <a:solidFill>
+                  <a:srgbClr val="075985"/>
+                </a:solidFill>
+                <a:latin typeface="Calibri" pitchFamily="34" charset="0"/>
+                <a:ea typeface="Calibri" pitchFamily="34" charset="-122"/>
+                <a:cs typeface="Calibri" pitchFamily="34" charset="-120"/>
+              </a:rPr>
+              <a:t>DA COMPRENDERE OGGI</a:t>
+            </a:r>
+            <a:pPr indent="0" marL="0">
+              <a:buNone/>
+            </a:pPr>
+            <a:r>
+              <a:rPr lang="en-US" sz="1100" dirty="0">
+                <a:solidFill>
+                  <a:srgbClr val="075985"/>
+                </a:solidFill>
+                <a:latin typeface="Calibri" pitchFamily="34" charset="0"/>
+                <a:ea typeface="Calibri" pitchFamily="34" charset="-122"/>
+                <a:cs typeface="Calibri" pitchFamily="34" charset="-120"/>
+              </a:rPr>
+              <a:t> · bus e porte three-state</a:t>
+            </a:r>
+            <a:endParaRPr lang="en-US" sz="1100" dirty="0"/>
+          </a:p>
+        </p:txBody>
+      </p:sp>
+      <p:sp>
+        <p:nvSpPr>
           <p:cNvPr id="25" name="Slide Number Placeholder 0"/>
           <p:cNvSpPr>
             <a:spLocks noGrp="1"/>
@@ -16817,6 +18836,133 @@
       </p:sp>
       <p:sp>
         <p:nvSpPr>
+          <p:cNvPr id="15" name="Shape 12"/>
+          <p:cNvSpPr/>
+          <p:nvPr/>
+        </p:nvSpPr>
+        <p:spPr>
+          <a:xfrm>
+            <a:off x="7723327" y="91440"/>
+            <a:ext cx="3919728" cy="274320"/>
+          </a:xfrm>
+          <a:prstGeom prst="rect">
+            <a:avLst/>
+          </a:prstGeom>
+          <a:solidFill>
+            <a:srgbClr val="E0F2FE"/>
+          </a:solidFill>
+          <a:ln w="12700">
+            <a:solidFill>
+              <a:srgbClr val="0369A1"/>
+            </a:solidFill>
+            <a:prstDash val="solid"/>
+          </a:ln>
+        </p:spPr>
+      </p:sp>
+      <p:sp>
+        <p:nvSpPr>
+          <p:cNvPr id="16" name="Shape 13"/>
+          <p:cNvSpPr/>
+          <p:nvPr/>
+        </p:nvSpPr>
+        <p:spPr>
+          <a:xfrm>
+            <a:off x="7723327" y="91440"/>
+            <a:ext cx="73152" cy="274320"/>
+          </a:xfrm>
+          <a:prstGeom prst="rect">
+            <a:avLst/>
+          </a:prstGeom>
+          <a:solidFill>
+            <a:srgbClr val="0369A1"/>
+          </a:solidFill>
+          <a:ln w="12700">
+            <a:solidFill>
+              <a:srgbClr val="0369A1"/>
+            </a:solidFill>
+            <a:prstDash val="solid"/>
+          </a:ln>
+        </p:spPr>
+      </p:sp>
+      <p:pic>
+        <p:nvPicPr>
+          <p:cNvPr id="17" name="Image 1" descr="preencoded.png">    </p:cNvPr>
+          <p:cNvPicPr>
+            <a:picLocks noChangeAspect="1"/>
+          </p:cNvPicPr>
+          <p:nvPr/>
+        </p:nvPicPr>
+        <p:blipFill>
+          <a:blip r:embed="rId2"/>
+          <a:stretch>
+            <a:fillRect/>
+          </a:stretch>
+        </p:blipFill>
+        <p:spPr>
+          <a:xfrm>
+            <a:off x="7851343" y="128016"/>
+            <a:ext cx="201168" cy="201168"/>
+          </a:xfrm>
+          <a:prstGeom prst="rect">
+            <a:avLst/>
+          </a:prstGeom>
+        </p:spPr>
+      </p:pic>
+      <p:sp>
+        <p:nvSpPr>
+          <p:cNvPr id="18" name="Text 14"/>
+          <p:cNvSpPr txBox="1"/>
+          <p:nvPr/>
+        </p:nvSpPr>
+        <p:spPr>
+          <a:xfrm>
+            <a:off x="8107375" y="91440"/>
+            <a:ext cx="3499104" cy="274320"/>
+          </a:xfrm>
+          <a:prstGeom prst="rect">
+            <a:avLst/>
+          </a:prstGeom>
+          <a:noFill/>
+          <a:ln/>
+        </p:spPr>
+        <p:txBody>
+          <a:bodyPr wrap="square" lIns="0" tIns="0" rIns="0" bIns="0" rtlCol="0" anchor="ctr"/>
+          <a:lstStyle/>
+          <a:p>
+            <a:pPr indent="0" marL="0">
+              <a:buNone/>
+            </a:pPr>
+            <a:r>
+              <a:rPr lang="en-US" sz="1100" b="1" dirty="0">
+                <a:solidFill>
+                  <a:srgbClr val="075985"/>
+                </a:solidFill>
+                <a:latin typeface="Calibri" pitchFamily="34" charset="0"/>
+                <a:ea typeface="Calibri" pitchFamily="34" charset="-122"/>
+                <a:cs typeface="Calibri" pitchFamily="34" charset="-120"/>
+              </a:rPr>
+              <a:t>DA COMPRENDERE OGGI</a:t>
+            </a:r>
+            <a:pPr indent="0" marL="0">
+              <a:buNone/>
+            </a:pPr>
+            <a:r>
+              <a:rPr lang="en-US" sz="1100" dirty="0">
+                <a:solidFill>
+                  <a:srgbClr val="075985"/>
+                </a:solidFill>
+                <a:latin typeface="Calibri" pitchFamily="34" charset="0"/>
+                <a:ea typeface="Calibri" pitchFamily="34" charset="-122"/>
+                <a:cs typeface="Calibri" pitchFamily="34" charset="-120"/>
+              </a:rPr>
+              <a:t> · bus e porte three-state</a:t>
+            </a:r>
+            <a:endParaRPr lang="en-US" sz="1100" dirty="0"/>
+          </a:p>
+        </p:txBody>
+      </p:sp>
+      <p:sp>
+        <p:nvSpPr>
           <p:cNvPr id="25" name="Slide Number Placeholder 0"/>
           <p:cNvSpPr>
             <a:spLocks noGrp="1"/>
@@ -17467,6 +19613,133 @@
               <a:t>Da registro a bus: le uscite di R raggiungono il bus solo finché è attivo il segnale di abilitazione c. E quando non lo è, che cosa succede al bus?</a:t>
             </a:r>
             <a:endParaRPr lang="en-US" sz="1550" dirty="0"/>
+          </a:p>
+        </p:txBody>
+      </p:sp>
+      <p:sp>
+        <p:nvSpPr>
+          <p:cNvPr id="19" name="Shape 17"/>
+          <p:cNvSpPr/>
+          <p:nvPr/>
+        </p:nvSpPr>
+        <p:spPr>
+          <a:xfrm>
+            <a:off x="7723327" y="91440"/>
+            <a:ext cx="3919728" cy="274320"/>
+          </a:xfrm>
+          <a:prstGeom prst="rect">
+            <a:avLst/>
+          </a:prstGeom>
+          <a:solidFill>
+            <a:srgbClr val="E0F2FE"/>
+          </a:solidFill>
+          <a:ln w="12700">
+            <a:solidFill>
+              <a:srgbClr val="0369A1"/>
+            </a:solidFill>
+            <a:prstDash val="solid"/>
+          </a:ln>
+        </p:spPr>
+      </p:sp>
+      <p:sp>
+        <p:nvSpPr>
+          <p:cNvPr id="20" name="Shape 18"/>
+          <p:cNvSpPr/>
+          <p:nvPr/>
+        </p:nvSpPr>
+        <p:spPr>
+          <a:xfrm>
+            <a:off x="7723327" y="91440"/>
+            <a:ext cx="73152" cy="274320"/>
+          </a:xfrm>
+          <a:prstGeom prst="rect">
+            <a:avLst/>
+          </a:prstGeom>
+          <a:solidFill>
+            <a:srgbClr val="0369A1"/>
+          </a:solidFill>
+          <a:ln w="12700">
+            <a:solidFill>
+              <a:srgbClr val="0369A1"/>
+            </a:solidFill>
+            <a:prstDash val="solid"/>
+          </a:ln>
+        </p:spPr>
+      </p:sp>
+      <p:pic>
+        <p:nvPicPr>
+          <p:cNvPr id="21" name="Image 0" descr="preencoded.png">    </p:cNvPr>
+          <p:cNvPicPr>
+            <a:picLocks noChangeAspect="1"/>
+          </p:cNvPicPr>
+          <p:nvPr/>
+        </p:nvPicPr>
+        <p:blipFill>
+          <a:blip r:embed="rId1"/>
+          <a:stretch>
+            <a:fillRect/>
+          </a:stretch>
+        </p:blipFill>
+        <p:spPr>
+          <a:xfrm>
+            <a:off x="7851343" y="128016"/>
+            <a:ext cx="201168" cy="201168"/>
+          </a:xfrm>
+          <a:prstGeom prst="rect">
+            <a:avLst/>
+          </a:prstGeom>
+        </p:spPr>
+      </p:pic>
+      <p:sp>
+        <p:nvSpPr>
+          <p:cNvPr id="22" name="Text 19"/>
+          <p:cNvSpPr txBox="1"/>
+          <p:nvPr/>
+        </p:nvSpPr>
+        <p:spPr>
+          <a:xfrm>
+            <a:off x="8107375" y="91440"/>
+            <a:ext cx="3499104" cy="274320"/>
+          </a:xfrm>
+          <a:prstGeom prst="rect">
+            <a:avLst/>
+          </a:prstGeom>
+          <a:noFill/>
+          <a:ln/>
+        </p:spPr>
+        <p:txBody>
+          <a:bodyPr wrap="square" lIns="0" tIns="0" rIns="0" bIns="0" rtlCol="0" anchor="ctr"/>
+          <a:lstStyle/>
+          <a:p>
+            <a:pPr indent="0" marL="0">
+              <a:buNone/>
+            </a:pPr>
+            <a:r>
+              <a:rPr lang="en-US" sz="1100" b="1" dirty="0">
+                <a:solidFill>
+                  <a:srgbClr val="075985"/>
+                </a:solidFill>
+                <a:latin typeface="Calibri" pitchFamily="34" charset="0"/>
+                <a:ea typeface="Calibri" pitchFamily="34" charset="-122"/>
+                <a:cs typeface="Calibri" pitchFamily="34" charset="-120"/>
+              </a:rPr>
+              <a:t>DA COMPRENDERE OGGI</a:t>
+            </a:r>
+            <a:pPr indent="0" marL="0">
+              <a:buNone/>
+            </a:pPr>
+            <a:r>
+              <a:rPr lang="en-US" sz="1100" dirty="0">
+                <a:solidFill>
+                  <a:srgbClr val="075985"/>
+                </a:solidFill>
+                <a:latin typeface="Calibri" pitchFamily="34" charset="0"/>
+                <a:ea typeface="Calibri" pitchFamily="34" charset="-122"/>
+                <a:cs typeface="Calibri" pitchFamily="34" charset="-120"/>
+              </a:rPr>
+              <a:t> · bus e porte three-state</a:t>
+            </a:r>
+            <a:endParaRPr lang="en-US" sz="1100" dirty="0"/>
           </a:p>
         </p:txBody>
       </p:sp>
@@ -19636,6 +21909,133 @@
       </p:sp>
       <p:sp>
         <p:nvSpPr>
+          <p:cNvPr id="15" name="Shape 12"/>
+          <p:cNvSpPr/>
+          <p:nvPr/>
+        </p:nvSpPr>
+        <p:spPr>
+          <a:xfrm>
+            <a:off x="7723327" y="91440"/>
+            <a:ext cx="3919728" cy="274320"/>
+          </a:xfrm>
+          <a:prstGeom prst="rect">
+            <a:avLst/>
+          </a:prstGeom>
+          <a:solidFill>
+            <a:srgbClr val="E0F2FE"/>
+          </a:solidFill>
+          <a:ln w="12700">
+            <a:solidFill>
+              <a:srgbClr val="0369A1"/>
+            </a:solidFill>
+            <a:prstDash val="solid"/>
+          </a:ln>
+        </p:spPr>
+      </p:sp>
+      <p:sp>
+        <p:nvSpPr>
+          <p:cNvPr id="16" name="Shape 13"/>
+          <p:cNvSpPr/>
+          <p:nvPr/>
+        </p:nvSpPr>
+        <p:spPr>
+          <a:xfrm>
+            <a:off x="7723327" y="91440"/>
+            <a:ext cx="73152" cy="274320"/>
+          </a:xfrm>
+          <a:prstGeom prst="rect">
+            <a:avLst/>
+          </a:prstGeom>
+          <a:solidFill>
+            <a:srgbClr val="0369A1"/>
+          </a:solidFill>
+          <a:ln w="12700">
+            <a:solidFill>
+              <a:srgbClr val="0369A1"/>
+            </a:solidFill>
+            <a:prstDash val="solid"/>
+          </a:ln>
+        </p:spPr>
+      </p:sp>
+      <p:pic>
+        <p:nvPicPr>
+          <p:cNvPr id="17" name="Image 0" descr="preencoded.png">    </p:cNvPr>
+          <p:cNvPicPr>
+            <a:picLocks noChangeAspect="1"/>
+          </p:cNvPicPr>
+          <p:nvPr/>
+        </p:nvPicPr>
+        <p:blipFill>
+          <a:blip r:embed="rId1"/>
+          <a:stretch>
+            <a:fillRect/>
+          </a:stretch>
+        </p:blipFill>
+        <p:spPr>
+          <a:xfrm>
+            <a:off x="7851343" y="128016"/>
+            <a:ext cx="201168" cy="201168"/>
+          </a:xfrm>
+          <a:prstGeom prst="rect">
+            <a:avLst/>
+          </a:prstGeom>
+        </p:spPr>
+      </p:pic>
+      <p:sp>
+        <p:nvSpPr>
+          <p:cNvPr id="18" name="Text 14"/>
+          <p:cNvSpPr txBox="1"/>
+          <p:nvPr/>
+        </p:nvSpPr>
+        <p:spPr>
+          <a:xfrm>
+            <a:off x="8107375" y="91440"/>
+            <a:ext cx="3499104" cy="274320"/>
+          </a:xfrm>
+          <a:prstGeom prst="rect">
+            <a:avLst/>
+          </a:prstGeom>
+          <a:noFill/>
+          <a:ln/>
+        </p:spPr>
+        <p:txBody>
+          <a:bodyPr wrap="square" lIns="0" tIns="0" rIns="0" bIns="0" rtlCol="0" anchor="ctr"/>
+          <a:lstStyle/>
+          <a:p>
+            <a:pPr indent="0" marL="0">
+              <a:buNone/>
+            </a:pPr>
+            <a:r>
+              <a:rPr lang="en-US" sz="1100" b="1" dirty="0">
+                <a:solidFill>
+                  <a:srgbClr val="075985"/>
+                </a:solidFill>
+                <a:latin typeface="Calibri" pitchFamily="34" charset="0"/>
+                <a:ea typeface="Calibri" pitchFamily="34" charset="-122"/>
+                <a:cs typeface="Calibri" pitchFamily="34" charset="-120"/>
+              </a:rPr>
+              <a:t>DA COMPRENDERE OGGI</a:t>
+            </a:r>
+            <a:pPr indent="0" marL="0">
+              <a:buNone/>
+            </a:pPr>
+            <a:r>
+              <a:rPr lang="en-US" sz="1100" dirty="0">
+                <a:solidFill>
+                  <a:srgbClr val="075985"/>
+                </a:solidFill>
+                <a:latin typeface="Calibri" pitchFamily="34" charset="0"/>
+                <a:ea typeface="Calibri" pitchFamily="34" charset="-122"/>
+                <a:cs typeface="Calibri" pitchFamily="34" charset="-120"/>
+              </a:rPr>
+              <a:t> · bus e porte three-state</a:t>
+            </a:r>
+            <a:endParaRPr lang="en-US" sz="1100" dirty="0"/>
+          </a:p>
+        </p:txBody>
+      </p:sp>
+      <p:sp>
+        <p:nvSpPr>
           <p:cNvPr id="25" name="Slide Number Placeholder 0"/>
           <p:cNvSpPr>
             <a:spLocks noGrp="1"/>

--- a/it/slides/14-Architettura_dei_Calcolatori-Registri_e_Bus.pptx
+++ b/it/slides/14-Architettura_dei_Calcolatori-Registri_e_Bus.pptx
@@ -126,19 +126,19 @@
   <p:extLst>
     <p:ext uri="{521415D9-36F7-43E2-AB2F-B90AF26B5E84}">
       <p14:sectionLst xmlns:p14="http://schemas.microsoft.com/office/powerpoint/2010/main">
-        <p14:section name="Apertura" id="{939c6c0e-b123-6229-d3e0-6226ce11b9f0}">
+        <p14:section name="Apertura" id="{2540b4bf-7598-9eef-743e-33f9e241f850}">
           <p14:sldIdLst>
             <p14:sldId id="256"/>
             <p14:sldId id="257"/>
           </p14:sldIdLst>
         </p14:section>
-        <p14:section name="Porte di parola e registri" id="{33e8b679-47ff-aa23-d499-2f2647490250}">
+        <p14:section name="Porte di parola e registri" id="{f4c85e4d-23a1-b16d-6b1c-7927ef27bda5}">
           <p14:sldIdLst>
             <p14:sldId id="258"/>
             <p14:sldId id="259"/>
           </p14:sldIdLst>
         </p14:section>
-        <p14:section name="Bus" id="{6b6cc6cf-a9e9-b1b3-ccfc-f9d4e4893ce8}">
+        <p14:section name="Bus" id="{1d7a1e7b-295a-d66d-7561-6db1dfd16df0}">
           <p14:sldIdLst>
             <p14:sldId id="260"/>
             <p14:sldId id="261"/>
@@ -146,14 +146,14 @@
             <p14:sldId id="263"/>
           </p14:sldIdLst>
         </p14:section>
-        <p14:section name="Buffer a tre stati" id="{efd7e1b8-07f4-3d54-69cb-bedef2f3db35}">
+        <p14:section name="Buffer a tre stati" id="{e49afc7e-760a-b232-2b00-bf507dd5aec2}">
           <p14:sldIdLst>
             <p14:sldId id="264"/>
             <p14:sldId id="265"/>
             <p14:sldId id="266"/>
           </p14:sldIdLst>
         </p14:section>
-        <p14:section name="Registri a scorrimento" id="{e2b72b0d-dcd3-fa42-8597-3cbe67a47d3d}">
+        <p14:section name="Registri a scorrimento" id="{5f721c4a-5aea-5082-27a1-3fbbf9d48afe}">
           <p14:sldIdLst>
             <p14:sldId id="267"/>
             <p14:sldId id="268"/>
@@ -162,7 +162,7 @@
             <p14:sldId id="271"/>
           </p14:sldIdLst>
         </p14:section>
-        <p14:section name="Ritorno alla macchina" id="{54efe03d-961b-380d-4650-bd095d8f4b05}">
+        <p14:section name="Ritorno alla macchina" id="{1c3709af-0618-0f5c-3e05-d872f734dd5a}">
           <p14:sldIdLst>
             <p14:sldId id="272"/>
             <p14:sldId id="273"/>

--- a/it/slides/14-Architettura_dei_Calcolatori-Registri_e_Bus.pptx
+++ b/it/slides/14-Architettura_dei_Calcolatori-Registri_e_Bus.pptx
@@ -126,19 +126,19 @@
   <p:extLst>
     <p:ext uri="{521415D9-36F7-43E2-AB2F-B90AF26B5E84}">
       <p14:sectionLst xmlns:p14="http://schemas.microsoft.com/office/powerpoint/2010/main">
-        <p14:section name="Apertura" id="{2540b4bf-7598-9eef-743e-33f9e241f850}">
+        <p14:section name="Apertura" id="{ebb8177b-f9ca-984e-9403-aa6cbfe50918}">
           <p14:sldIdLst>
             <p14:sldId id="256"/>
             <p14:sldId id="257"/>
           </p14:sldIdLst>
         </p14:section>
-        <p14:section name="Porte di parola e registri" id="{f4c85e4d-23a1-b16d-6b1c-7927ef27bda5}">
+        <p14:section name="Porte di parola e registri" id="{3cb42f51-3b5a-c2f4-8bdf-0e0ee2c88eb9}">
           <p14:sldIdLst>
             <p14:sldId id="258"/>
             <p14:sldId id="259"/>
           </p14:sldIdLst>
         </p14:section>
-        <p14:section name="Bus" id="{1d7a1e7b-295a-d66d-7561-6db1dfd16df0}">
+        <p14:section name="Bus" id="{069be207-346f-0e8e-4a61-08f6b826e28c}">
           <p14:sldIdLst>
             <p14:sldId id="260"/>
             <p14:sldId id="261"/>
@@ -146,14 +146,14 @@
             <p14:sldId id="263"/>
           </p14:sldIdLst>
         </p14:section>
-        <p14:section name="Buffer a tre stati" id="{e49afc7e-760a-b232-2b00-bf507dd5aec2}">
+        <p14:section name="Buffer a tre stati" id="{1afcccb9-dd61-2f4d-a4c1-d5172657505c}">
           <p14:sldIdLst>
             <p14:sldId id="264"/>
             <p14:sldId id="265"/>
             <p14:sldId id="266"/>
           </p14:sldIdLst>
         </p14:section>
-        <p14:section name="Registri a scorrimento" id="{5f721c4a-5aea-5082-27a1-3fbbf9d48afe}">
+        <p14:section name="Registri a scorrimento" id="{e69df7d5-1ce8-2078-775a-526deabdf733}">
           <p14:sldIdLst>
             <p14:sldId id="267"/>
             <p14:sldId id="268"/>
@@ -162,7 +162,7 @@
             <p14:sldId id="271"/>
           </p14:sldIdLst>
         </p14:section>
-        <p14:section name="Ritorno alla macchina" id="{1c3709af-0618-0f5c-3e05-d872f734dd5a}">
+        <p14:section name="Ritorno alla macchina" id="{d88fd8eb-0328-51a4-b728-aa296ef7b387}">
           <p14:sldIdLst>
             <p14:sldId id="272"/>
             <p14:sldId id="273"/>
@@ -574,7 +574,7 @@
           <a:p>
             <a:r>
               <a:rPr lang="en-US" dirty="0"/>
-              <a:t>La lezione precedente ha costruito un registro con i flip-flop. Questa si chiede come i registri si parlano: come una parola passa dall'uno all'altro, lungo quali fili, e che cosa accade quando molti registri condividono gli stessi fili. Le risposte sono il bus, il buffer a tre stati e il registro a scorrimento. La battuta di Doc Brown in copertina qui è ironica: ai dati le strade servono, e un bus è esattamente una strada. Il riscaldamento parte da un fatto del kit: il suo display riceve ogni pixel un bit alla volta.
+              <a:t>La lezione precedente ha costruito un registro con i flip-flop. Questa si chiede come i registri comunicano: come una parola passa dall'uno all'altro, lungo quali fili, e che cosa accade quando molti registri condividono gli stessi fili. Le risposte sono il bus, il buffer three-state e il registro a scorrimento, le macchine elementari di ogni percorso dei dati. La battuta di Doc Brown in copertina è ironica in questo contesto: i dati hanno eccome bisogno di strade, e un bus è esattamente questo. Il riscaldamento parte da un fatto sul kit: il suo display riceve ogni pixel un bit alla volta.
 Stato di apprendimento: DA COMPRENDERE OGGI, alla fine di questa lezione lo spiegate, lo seguite passo passo e lo applicate da soli; DA UTILIZZARE OGGI, oggi seguite e usate la ricetta; come funziona dentro si spiega più avanti, o non fa parte del corso; DA COMPRENDERE PIÙ AVANTI, riconoscete il nome e lo scopo; lo spiega una lezione successiva. Una slide senza etichetta è contesto: una storia, un esempio, una domanda, un esercizio.
 Stato di apprendimento di questa lezione. DA COMPRENDERE OGGI: i registri a scorrimento; i registri come flip-flop; bus e porte three-state. DA UTILIZZARE OGGI: il programma completo, gli strumenti di PRG32 (si usa, non si studia, in questo corso). DA COMPRENDERE PIÙ AVANTI: l'I/O mappato in memoria (Lezione 15); memorie e indirizzi (Lezione 15). Una slide senza etichetta è contesto: una storia, un esempio, una domanda, un esercizio.
 Per il docente: Spirale: il display del kit PRG32 riceve ogni pixel un bit alla volta; il riscaldamento invia un byte in serie in assembly, e la lezione costruisce le macchine che lo fanno in hardware.</a:t>
@@ -665,7 +665,7 @@
           <a:p>
             <a:r>
               <a:rPr lang="en-US" dirty="0"/>
-              <a:t>Applicata a un'intera parola, una porta a tre stati lascia passare un bus oppure lo scollega: quando l'abilitazione è attiva il bus di uscita riproduce quello di ingresso; altrimenti tutte le sue linee sono in alta impedenza. I piedini del chip del kit funzionano così: ciascuno può essere configurato come uscita, che pilota il filo, oppure rilasciato e usato come ingresso. I piedini del joystick sono ingressi; quelli del display sono uscite.
+              <a:t>Applicata a un'intera parola, una porta three-state lascia passare un bus o lo scollega: quando è abilitata, il bus di uscita riproduce quello di ingresso; altrimenti tutte le sue linee sono in alta impedenza. I piedini del chip del kit funzionano così: ciascuno si può configurare come uscita, che pilota il suo filo, oppure rilasciare e usare come ingresso. I piedini del joystick sono ingressi; quelli del display sono uscite.
 DA COMPRENDERE OGGI: bus e porte three-state.
 Per il docente: Tristate di parola. Sul kit i piedini del joystick sono configurati come ingressi (i loro buffer di uscita in alta impedenza) e quelli del display come uscite.</a:t>
             </a:r>
@@ -755,7 +755,7 @@
           <a:p>
             <a:r>
               <a:rPr lang="en-US" dirty="0"/>
-              <a:t>Lo schema completo di un bus comune. Ogni registro sorgente raggiunge il bus attraverso un buffer a tre stati con la propria abilitazione. La regola è rigida: al più un'abilitazione è attiva alla volta, così una sorgente pilota il bus e tutte le altre sono scollegate. Dall'altro lato ogni registro destinazione è collegato al bus, e prende il dato solo quello il cui segnale di caricamento è attivo. Scegliere sorgente e destinazione è compito dei decodificatori pilotati dall'unità di controllo.
+              <a:t>Lo schema completo di un bus comune. Ogni registro sorgente raggiunge il bus attraverso un buffer three-state con la sua abilitazione. La regola è rigorosa: al più un'abilitazione può essere attiva in ogni momento, così che esattamente una sorgente piloti il bus mentre tutte le altre sono scollegate; due sorgenti attive si contenderebbero il filo. Dal lato ricevente ogni registro destinazione è collegato al bus, e solo quello con il segnale di caricamento attivo cattura il dato. Scegliere sorgente e destinazione è compito di decoder pilotati dall'unità di controllo, che la Lezione 18 descrive.
 DA COMPRENDERE OGGI: bus e porte three-state.
 Per il docente: Collegamento di bus: OR di bus; trasferimento verso registri-destinazione. Dentro i chip moderni le lunghe linee condivise sono di solito sostituite da multiplexer, che fanno la stessa selezione senza stati di alta impedenza; tra chip i bus a tre stati restano la regola.</a:t>
             </a:r>
@@ -845,7 +845,7 @@
           <a:p>
             <a:r>
               <a:rPr lang="en-US" dirty="0"/>
-              <a:t>Un registro a scorrimento è una catena di celle da un bit in cui, a ogni impulso di clock, ogni bit passa alla cella adiacente. Ogni cella è un flip-flop D il cui ingresso è l'uscita della cella vicina. Il comportamento sensibile al fronte del flip-flop è essenziale: con latch trasparenti un bit attraverserebbe l'intera catena durante un solo impulso di clock. Lo scorrimento può avere un verso fisso oppure un verso scelto da una linea di controllo.
+              <a:t>Un registro a scorrimento è una catena di celle da un bit in cui, a ogni impulso di clock, ogni bit si sposta nella cella adiacente. Ogni cella è un flip-flop D il cui ingresso è l'uscita della vicina. Il comportamento sul fronte del flip-flop è essenziale: con latch trasparenti un bit attraverserebbe di corsa l'intera catena durante un solo impulso di clock. Lo scorrimento può avvenire in una direzione fissa oppure in una direzione scelta da una linea di controllo.
 DA COMPRENDERE OGGI: i registri a scorrimento.
 Per il docente: In inglese: shift registers. Qui i flip-flop sensibili al fronte sono essenziali: con latch trasparenti un bit attraverserebbe l'intera catena in un solo impulso di clock (Lezione 13).</a:t>
             </a:r>
@@ -935,7 +935,7 @@
           <a:p>
             <a:r>
               <a:rPr lang="en-US" dirty="0"/>
-              <a:t>La stessa catena di flip-flop dà quattro macchine, a seconda di dove entrano ed escono i dati. Ingresso seriale, uscita seriale: una linea di ritardo. Ingresso seriale, uscita parallela: raccoglie bit che arrivano uno alla volta e presenta la parola intera. Ingresso parallelo, uscita seriale: prende una parola e la manda fuori bit per bit. Ingresso parallelo, uscita parallela, senza scorrimento, è il registro ordinario. La seconda e la terza sono i due capi di ogni collegamento seriale.
+              <a:t>La stessa catena di flip-flop dà quattro macchine, secondo dove i dati entrano ed escono. Ingresso seriale, uscita seriale: una linea di ritardo. Ingresso seriale, uscita parallela: raccoglie i bit che arrivano uno alla volta e presenta la parola completa. Ingresso parallelo, uscita seriale: accetta una parola e la emette bit per bit. Ingresso parallelo, uscita parallela, senza scorrimento, è il registro ordinario. La seconda e la terza sono i due capi di ogni collegamento seriale.
 DA COMPRENDERE OGGI: i registri a scorrimento.
 Per il docente: SISO, SIPO, PISO e PIPO. La linea di clock non è disegnata.</a:t>
             </a:r>
@@ -1025,7 +1025,7 @@
           <a:p>
             <a:r>
               <a:rPr lang="en-US" dirty="0"/>
-              <a:t>Due modi di spostare una parola tra registri. In un trasferimento seriale l'uscita seriale di un registro a scorrimento alimenta l'ingresso seriale di un altro: n impulsi di clock, un filo. In un trasferimento parallelo le uscite di un registro alimentano gli ingressi di un altro: un impulso di clock, n fili. La frase a destra è il compromesso di tutta la lezione: spostare una parola di n bit costa o tempo o rame.
+              <a:t>Due modi di spostare una parola tra registri. In un trasferimento seriale l'uscita seriale di un registro a scorrimento alimenta l'ingresso seriale di un altro: n impulsi di clock, un filo. In un trasferimento parallelo le uscite di un registro alimentano gli ingressi di un altro: un impulso di clock, n fili. La frase a destra enuncia il compromesso dell'intera lezione: spostare una parola di n bit costa o tempo o rame.
 DA COMPRENDERE OGGI: i registri a scorrimento.
 Per il docente: Trasferimento seriale (ingresso seriale, uscita seriale) e trasferimento parallelo (ingresso parallelo, uscita parallela).</a:t>
             </a:r>
@@ -1115,7 +1115,7 @@
           <a:p>
             <a:r>
               <a:rPr lang="en-US" dirty="0"/>
-              <a:t>Un collegamento seriale completo in cinque passi: il dato viene caricato in parallelo in un registro a scorrimento; ne esce, un bit per passo; i bit viaggiano su una sola linea; all'altro capo un secondo registro a scorrimento li raccoglie, uno per passo; e la parola ricostruita viene passata avanti in parallelo. È l'hardware del riscaldamento, ed è così che il display del kit riceve ogni pixel. Ogni standard seriale, dalla vecchia porta seriale a USB, poggia su una coppia di registri a scorrimento.
+              <a:t>Un collegamento seriale completo in cinque passi: il dato viene caricato in parallelo in un registro a scorrimento; viene fatto uscire, un bit per passo; i bit viaggiano su una sola linea; all'altro capo un secondo registro a scorrimento li raccoglie, uno per passo; e la parola ricostruita viene consegnata in parallelo. È la controparte hardware del riscaldamento, e il modo in cui il display del kit riceve ogni pixel. Ogni standard seriale, dalla storica porta seriale all'USB, poggia su una coppia di registri a scorrimento.
 DA COMPRENDERE OGGI: i registri a scorrimento.
 Per il docente: Trasformazione serie-parallelo di un dato. UART, SPI, I2C, I2S e USB poggiano tutti su una coppia di registri a scorrimento, uno per estremità.</a:t>
             </a:r>
@@ -1205,7 +1205,7 @@
           <a:p>
             <a:r>
               <a:rPr lang="en-US" dirty="0"/>
-              <a:t>Quattro registri di tre bit e un decodificatore fanno una piccola memoria. Due linee di indirizzo scelgono, attraverso il decodificatore, uno dei quattro registri; tre linee portano i dati in ingresso e tre li portano in uscita. La completano tre linee di controllo: chip select, perché la memoria risponda solo quando è selezionata; una linea che dice lettura o scrittura; e output enable, che comanda uscite a tre stati così che più memorie possano condividere un bus. Qui non c'è nulla di nuovo: decodificatore, registri, buffer a tre stati. La prossima lezione lo porta su scala più grande.
+              <a:t>Quattro registri da tre bit e un decoder costituiscono una piccola memoria. Due linee di indirizzo selezionano, attraverso il decoder, uno dei quattro registri; tre linee portano i dati in ingresso e tre in uscita. Tre linee di controllo completano il progetto: il chip select, così che la memoria risponda solo quando è selezionata; una linea di lettura/scrittura; e l'output enable, che controlla uscite three-state così che più memorie possano condividere un bus. Nulla qui è nuovo, solo decoder, registri e buffer three-state; la prossima lezione porta la stessa struttura alla scala della memoria centrale.
 DA COMPRENDERE OGGI: i registri come flip-flop. DA COMPRENDERE PIÙ AVANTI: memorie e indirizzi (si studia nella Lezione 15).
 Per il docente: Memoria 4 (registri) x 3 (bit): otto ingressi (I0-I2, A0-A1, CS, RD, OE) e tre uscite. La prossima lezione porta questo schema alla scala della memoria centrale.</a:t>
             </a:r>
@@ -1295,8 +1295,8 @@
           <a:p>
             <a:r>
               <a:rPr lang="en-US" dirty="0"/>
-              <a:t>Pensate a due uscite collegate allo stesso filo, una a 0 e una a 1. Un buffer a tre stati non ha nulla a che vedere con la velocità, con la memorizzazione o con la conversione: scollega le sorgenti che non sono state scelte.
-Un bit per impulso di clock. L'alternativa, un trasferimento parallelo, richiederebbe un impulso e trentadue fili.
+              <a:t>Per la prima domanda si immaginano due uscite collegate allo stesso filo, una a 0 e l'altra a 1. Un buffer three-state non riguarda né la velocità, né la memorizzazione, né la conversione: scollega le sorgenti che non sono state selezionate.
+Per la seconda: un bit per impulso di clock. L'alternativa, un trasferimento parallelo, richiederebbe un impulso e trentadue fili.
 Per il docente: 1. Risposta: B. Più sorgenti condividono le stesse linee; tutte tranne una devono essere elettricamente scollegate (alta impedenza), altrimenti due uscite si contenderebbero il filo.
 2. Risposta: C. Un bit per impulso: n impulsi per n bit. Un trasferimento parallelo richiede un impulso e n fili.</a:t>
             </a:r>
@@ -1386,7 +1386,7 @@
           <a:p>
             <a:r>
               <a:rPr lang="en-US" dirty="0"/>
-              <a:t>Dieci linee di indirizzo selezionano una parola tra 2 alla 10; ogni parola ha 8 bit. Moltiplicate i due numeri. La prima opzione moltiplica le linee invece di usare la potenza.
+              <a:t>Dieci linee di indirizzo selezionano una parola tra 2^10, e ogni parola ha 8 bit; i due numeri si moltiplicano. La prima opzione moltiplica i numeri di linee invece di elevare due alla potenza delle linee di indirizzo, un errore frequente.
 Per il docente: Risposta: C. 2^10 = 1024 parole di 8 bit: 8192 bit, cioè 1 KiB.</a:t>
             </a:r>
             <a:endParaRPr lang="en-US" dirty="0"/>
@@ -1475,7 +1475,7 @@
           <a:p>
             <a:r>
               <a:rPr lang="en-US" dirty="0"/>
-              <a:t>Dieci termini. Three-state, o tri-state, è «a tre stati»; high impedance è l'alta impedenza. Uno shift register è un registro a scorrimento. Load e strobe indicano il segnale che fa prendere a un registro il proprio ingresso. Chip select è la linea che sceglie quale dispositivo su un bus condiviso deve rispondere.</a:t>
+              <a:t>Dieci termini. Three-state, o tri-state, è a tre stati; high impedance è alta impedenza. Uno shift register è un registro a scorrimento. Load e strobe indicano il segnale che fa catturare a un registro il suo ingresso. Il chip select è la linea che indica quale dispositivo su un bus condiviso deve rispondere.</a:t>
             </a:r>
             <a:endParaRPr lang="en-US" dirty="0"/>
           </a:p>
@@ -1563,7 +1563,7 @@
           <a:p>
             <a:r>
               <a:rPr lang="en-US" dirty="0"/>
-              <a:t>Cinque obiettivi. Descrivere un registro come insieme di flip-flop con un clock comune e un segnale di caricamento. Spiegare che cos'è un bus e confrontare i bus dedicati con un bus comune. Dire perché a un bus comune servono i buffer a tre stati e che cosa significa alta impedenza. Descrivere un registro a scorrimento e le sue quattro combinazioni di ingresso e uscita seriali e paralleli. E convertire un dato da parallelo a seriale e viceversa, in hardware e in assembly.</a:t>
+              <a:t>Cinque risultati di apprendimento. Descrivere un registro come un insieme di flip-flop con un clock comune e un segnale di caricamento. Spiegare che cos'è un bus e confrontare i bus dedicati con un bus comune. Dire perché un bus comune richiede buffer three-state e che cosa significa alta impedenza. Descrivere un registro a scorrimento e le sue quattro combinazioni di ingresso e uscita seriali e parallele. E convertire un dato dalla forma parallela a quella seriale e ritorno, sia in hardware sia in assembly.</a:t>
             </a:r>
             <a:endParaRPr lang="en-US" dirty="0"/>
           </a:p>
@@ -1651,7 +1651,7 @@
           <a:p>
             <a:r>
               <a:rPr lang="en-US" dirty="0"/>
-              <a:t>Cinque conclusioni. Un registro è una forma di memoria con un modo di funzionare elementare. I registri si leggono e si scrivono attraverso i bus. A un bus comune servono circuiti a tre stati: 0, 1 e scollegato. I dati viaggiano in serie o in parallelo, e i registri a scorrimento convertono tra le due forme. E un decodificatore davanti a un gruppo di registri fa una memoria, che è l'argomento della prossima lezione.
+              <a:t>Cinque conclusioni. Un registro è una forma di memoria con un modo di funzionamento elementare. I registri si leggono e si scrivono attraverso i bus. Un bus comune richiede circuiti a tre stati: 0, 1 e scollegato. I dati viaggiano in serie o in parallelo, e i registri a scorrimento convertono tra le due forme. E un decoder posto davanti a un gruppo di registri costituisce una memoria, che è l'argomento della prossima lezione.
 Stato di apprendimento, riepilogo. DA COMPRENDERE OGGI: i registri a scorrimento; i registri come flip-flop; bus e porte three-state. DA UTILIZZARE OGGI: il programma completo, gli strumenti di PRG32 (si usa, non si studia, in questo corso). DA COMPRENDERE PIÙ AVANTI: l'I/O mappato in memoria (Lezione 15); memorie e indirizzi (Lezione 15). Una slide senza etichetta è contesto: una storia, un esempio, una domanda, un esercizio.
 Per il docente: Prossima lezione: la memoria.</a:t>
             </a:r>
@@ -1741,7 +1741,7 @@
           <a:p>
             <a:r>
               <a:rPr lang="en-US" dirty="0"/>
-              <a:t>Una parola è un vettore di n bit. Una porta di parola sono n porte identiche con un ingresso di controllo comune: con il controllo a 1 la parola passa invariata, con il controllo a 0 ogni bit è forzato a 0. È l'estensione naturale di una porta da un bit a una parola. Le istruzioni bit a bit di RISC-V sono porte di parola larghe trentadue bit, e con esse è costruito il multiplexer su parole della Lezione 11.
+              <a:t>Una parola è un vettore di n bit. Una porta di parola consiste di n porte identiche che condividono un ingresso di controllo: con il controllo a 1 la parola passa invariata, con il controllo a 0 ogni bit è forzato a 0. È la generalizzazione naturale di una porta da un bit a una parola. Le istruzioni bit a bit di RISC-V sono porte di parola larghe trentadue bit, e il multiplexer di parole della Lezione 11 è costruito con esse.
 DA COMPRENDERE OGGI: i registri come flip-flop.
 Per il docente: In inglese: word gates. Il multiplexer su parole della Lezione 11 è costruito con porte di parola.</a:t>
             </a:r>
@@ -1831,7 +1831,7 @@
           <a:p>
             <a:r>
               <a:rPr lang="en-US" dirty="0"/>
-              <a:t>Un registro memorizza un gruppo di bit: nella forma più semplice è un gruppo di flip-flop con un clock comune. L'esempio classico in un solo chip è il 74273, con otto flip-flop D, un clock e un clear. Caricare un registro significa memorizzare il dato presente ai suoi ingressi, e accade quando il segnale di caricamento è attivo, di norma in sincronia con il clock. Ciascuno dei registri da x1 a x31 di RISC-V è fatto di trentadue flip-flop di questo tipo.
+              <a:t>Un registro memorizza un gruppo di bit; nella sua forma più semplice è un gruppo di flip-flop con un clock comune. Il classico esempio su un solo chip è il 74273, con otto flip-flop D, un clock e un ingresso di azzeramento. Caricare un registro significa memorizzare il dato presente ai suoi ingressi, il che avviene quando il segnale di caricamento è attivo, di norma in sincronia con il clock. Ciascuno dei registri RISC-V da x1 a x31 consiste di trentadue flip-flop di questo tipo.
 DA COMPRENDERE OGGI: i registri come flip-flop.
 Per il docente: Datasheet: ti.com/lit/ds/symlink/sn74ls273.pdf. Il 7474 contiene due flip-flop D con preset e clear. Per il flip-flop si veda la Lezione 13.
 Immagini: Animation Technologies LifeView LR25 - Hitachi LS273-2523.jpg, Raimond Spekking, CC BY-SA 4.0, Wikimedia Commons.</a:t>
@@ -1922,7 +1922,7 @@
           <a:p>
             <a:r>
               <a:rPr lang="en-US" dirty="0"/>
-              <a:t>Un bus è l'insieme delle linee che trasporta un dato tra i componenti di un sistema. La parola viene dal latino omnibus, «per tutti». Un bus di n linee trasporta in un passo una parola di n bit. Il trasferimento da un registro X a un registro Y è l'azione elementare da cui si costruisce tutto il resto: quasi ogni istruzione che avete scritto è, sotto sotto, una breve sequenza di trasferimenti tra registri.
+              <a:t>Un bus è l'insieme delle linee che porta un dato tra i componenti di un sistema; la parola deriva dal latino omnibus, "per tutti". Un bus di n linee porta una parola di n bit in un passo. Il trasferimento da un registro X a un registro Y è l'azione elementare di cui tutte le altre sono composte: quasi ogni istruzione scritta finora è, a livello hardware, una breve sequenza di trasferimenti tra registri, una descrizione nota come livello dei trasferimenti tra registri.
 DA COMPRENDERE OGGI: bus e porte three-state.
 Per il docente: Quasi ogni istruzione della Lezione 02 è, in fondo, una sequenza di trasferimenti tra registri.</a:t>
             </a:r>
@@ -2012,7 +2012,7 @@
           <a:p>
             <a:r>
               <a:rPr lang="en-US" dirty="0"/>
-              <a:t>Due modi di collegare i registri. Con i bus dedicati ogni possibile trasferimento ha le proprie linee: più trasferimenti possono avvenire insieme, ma i fili crescono con il quadrato del numero di registri. Con un bus comune un solo percorso serve tutti i trasferimenti: ogni volta si scelgono una sorgente e una destinazione, e un trasferimento richiede due passi, dalla sorgente al bus e dal bus alla destinazione. È economico e diffuso, al prezzo di fare un trasferimento alla volta.
+              <a:t>Due modi di interconnettere i registri. Con bus dedicati ogni trasferimento possibile ha le sue linee: più trasferimenti possono avvenire contemporaneamente, ma i collegamenti crescono con il quadrato del numero di registri. Con un bus comune un solo percorso serve ogni trasferimento: di volta in volta si scelgono una sorgente e una destinazione, e un trasferimento richiede due passi, dalla sorgente al bus e dal bus alla destinazione. È economico e diffuso, al prezzo di eseguire un trasferimento alla volta. La scelta è un compromesso archetipico tra costo e parallelismo.
 DA COMPRENDERE OGGI: bus e porte three-state.
 Per il docente: Esistono soluzioni intermedie: più bus, ciascuno condiviso da un gruppo di registri. I processori reali le usano.</a:t>
             </a:r>
@@ -2102,7 +2102,7 @@
           <a:p>
             <a:r>
               <a:rPr lang="en-US" dirty="0"/>
-              <a:t>Un trasferimento può essere parallelo, con gli n bit che viaggiano insieme su n linee in un passo, oppure seriale, con i bit che viaggiano uno dopo l'altro su una sola linea in n passi, oppure misto, per esempio un byte alla volta. Ricordate l'ultima riga: dentro un chip i bus sono paralleli; tra chip e tra macchine oggi sono quasi sempre seriali, perché ad altissima velocità è più facile tenere pulita una linea che tenere al passo trentadue linee.
+              <a:t>Un trasferimento può essere parallelo, con gli n bit che viaggiano insieme su n linee in un passo; seriale, con i bit che viaggiano in sequenza su una linea in n passi; o misto, per esempio un byte alla volta. L'ultima riga registra una tendenza significativa: dentro un chip i bus sono paralleli, mentre tra chip e tra macchine oggi sono quasi sempre seriali, perché ad altissima velocità è più facile tenere pulita una linea che mantenere sincronizzate trentadue linee.
 DA COMPRENDERE OGGI: bus e porte three-state.
 Per il docente: USB, SATA, PCI Express, HDMI ed Ethernet sono tutti seriali: ad altissima velocità è più facile tenere pulita una linea veloce che tenere al passo trentadue linee.
 Immagini: Hand Etched PCB.png, Tpdwkouaa, CC BY-SA 4.0, Wikimedia Commons.</a:t>
@@ -2193,7 +2193,7 @@
           <a:p>
             <a:r>
               <a:rPr lang="en-US" dirty="0"/>
-              <a:t>Le due metà di un trasferimento su bus comune. A sinistra, dal bus a un registro: il dato sul bus viene caricato in R quando il segnale di caricamento è attivo. A destra, da un registro al bus: le uscite di R raggiungono il bus attraverso un buffer, e solo finché il segnale di abilitazione è attivo. La domanda in fondo porta alla sezione successiva: quando l'abilitazione non è attiva, che cosa deve essere l'uscita del buffer, per non disturbare il bus?
+              <a:t>Le due metà di un trasferimento su bus comune. A sinistra, dal bus a un registro: il dato sul bus viene caricato in R quando il segnale di caricamento è attivo. A destra, da un registro al bus: le uscite di R raggiungono il bus attraverso un buffer, e solo mentre il segnale di abilitazione è attivo. La domanda in fondo introduce la sezione successiva: quando l'abilitazione non è attiva, che cosa deve essere l'uscita del buffer per non disturbare il bus?
 DA COMPRENDERE OGGI: bus e porte three-state.
 Per il docente: Trasferimento dati su bus unico: caricamento di un registro (da bus a registro) e trasferimento da registro a bus.</a:t>
             </a:r>
@@ -2283,7 +2283,7 @@
           <a:p>
             <a:r>
               <a:rPr lang="en-US" dirty="0"/>
-              <a:t>Un'uscita a tre stati ha una terza condizione oltre a 0 e 1: l'alta impedenza, indicata con z, in cui l'uscita è elettricamente scollegata dal filo. Decide un ingresso di abilitazione: quando vale 1 la porta lavora normalmente, quando vale 0 l'uscita è z. La tabella lo mostra per un AND con abilitazione: quattro righe di un AND ordinario, e un'ultima riga in cui l'uscita è flottante quali che siano gli ingressi. Elettricamente, entrambi i transistor dello stadio di uscita sono spenti.
+              <a:t>Un'uscita three-state ha una terza condizione oltre a 0 e 1: l'alta impedenza, scritta z, in cui l'uscita è elettricamente scollegata dal filo. Un ingresso di abilitazione decide: quando vale 1 la porta funziona normalmente, quando vale 0 l'uscita è z. La tabella lo mostra per un AND con abilitazione: quattro righe di un AND ordinario, e un'ultima riga in cui l'uscita fluttua indipendentemente dagli ingressi. Elettricamente, entrambi i transistor dello stadio di uscita sono spenti.
 DA COMPRENDERE OGGI: bus e porte three-state.
 Per il docente: AND tristate; segnale di abilitazione in logica 1-attiva. Elettricamente, entrambi i transistor di uscita sono spenti.</a:t>
             </a:r>
@@ -3363,7 +3363,7 @@
                 <a:ea typeface="Calibri" pitchFamily="34" charset="-122"/>
                 <a:cs typeface="Calibri" pitchFamily="34" charset="-120"/>
               </a:rPr>
-              <a:t>14-Architettura_dei_Calcolatori-Registri_e_Bus-Codice.pptx</a:t>
+              <a:t>14-Architettura_dei_Calcolatori-Registri_e_Bus-Lab.pptx</a:t>
             </a:r>
             <a:endParaRPr lang="en-US" sz="1300" dirty="0"/>
           </a:p>

--- a/it/slides/14-Architettura_dei_Calcolatori-Registri_e_Bus.pptx
+++ b/it/slides/14-Architettura_dei_Calcolatori-Registri_e_Bus.pptx
@@ -126,19 +126,19 @@
   <p:extLst>
     <p:ext uri="{521415D9-36F7-43E2-AB2F-B90AF26B5E84}">
       <p14:sectionLst xmlns:p14="http://schemas.microsoft.com/office/powerpoint/2010/main">
-        <p14:section name="Apertura" id="{ebb8177b-f9ca-984e-9403-aa6cbfe50918}">
+        <p14:section name="Apertura" id="{a5a920f2-7ff3-a1e8-7537-f59622e7aa57}">
           <p14:sldIdLst>
             <p14:sldId id="256"/>
             <p14:sldId id="257"/>
           </p14:sldIdLst>
         </p14:section>
-        <p14:section name="Porte di parola e registri" id="{3cb42f51-3b5a-c2f4-8bdf-0e0ee2c88eb9}">
+        <p14:section name="Porte di parola e registri" id="{48f28141-e915-1e91-69f5-511ebdfd42f7}">
           <p14:sldIdLst>
             <p14:sldId id="258"/>
             <p14:sldId id="259"/>
           </p14:sldIdLst>
         </p14:section>
-        <p14:section name="Bus" id="{069be207-346f-0e8e-4a61-08f6b826e28c}">
+        <p14:section name="Bus" id="{c550bb63-ed37-c7d0-7ddb-021769e39f54}">
           <p14:sldIdLst>
             <p14:sldId id="260"/>
             <p14:sldId id="261"/>
@@ -146,14 +146,14 @@
             <p14:sldId id="263"/>
           </p14:sldIdLst>
         </p14:section>
-        <p14:section name="Buffer a tre stati" id="{1afcccb9-dd61-2f4d-a4c1-d5172657505c}">
+        <p14:section name="Buffer a tre stati" id="{ef9807f8-e4c5-e35f-bffb-031ff85c9bf6}">
           <p14:sldIdLst>
             <p14:sldId id="264"/>
             <p14:sldId id="265"/>
             <p14:sldId id="266"/>
           </p14:sldIdLst>
         </p14:section>
-        <p14:section name="Registri a scorrimento" id="{e69df7d5-1ce8-2078-775a-526deabdf733}">
+        <p14:section name="Registri a scorrimento" id="{45c5127c-77f0-4cdb-7f7a-3f2ca9167bb9}">
           <p14:sldIdLst>
             <p14:sldId id="267"/>
             <p14:sldId id="268"/>
@@ -162,7 +162,7 @@
             <p14:sldId id="271"/>
           </p14:sldIdLst>
         </p14:section>
-        <p14:section name="Ritorno alla macchina" id="{d88fd8eb-0328-51a4-b728-aa296ef7b387}">
+        <p14:section name="Ritorno alla macchina" id="{1e48fb8d-351b-ecca-bd71-c1edf60992fa}">
           <p14:sldIdLst>
             <p14:sldId id="272"/>
             <p14:sldId id="273"/>

--- a/it/slides/14-Architettura_dei_Calcolatori-Registri_e_Bus.pptx
+++ b/it/slides/14-Architettura_dei_Calcolatori-Registri_e_Bus.pptx
@@ -126,19 +126,19 @@
   <p:extLst>
     <p:ext uri="{521415D9-36F7-43E2-AB2F-B90AF26B5E84}">
       <p14:sectionLst xmlns:p14="http://schemas.microsoft.com/office/powerpoint/2010/main">
-        <p14:section name="Apertura" id="{a5a920f2-7ff3-a1e8-7537-f59622e7aa57}">
+        <p14:section name="Apertura" id="{f6eafdbd-0f2d-112e-d28f-9723c03f07f5}">
           <p14:sldIdLst>
             <p14:sldId id="256"/>
             <p14:sldId id="257"/>
           </p14:sldIdLst>
         </p14:section>
-        <p14:section name="Porte di parola e registri" id="{48f28141-e915-1e91-69f5-511ebdfd42f7}">
+        <p14:section name="Porte di parola e registri" id="{96443f4f-a2f0-af38-0adc-173b09794878}">
           <p14:sldIdLst>
             <p14:sldId id="258"/>
             <p14:sldId id="259"/>
           </p14:sldIdLst>
         </p14:section>
-        <p14:section name="Bus" id="{c550bb63-ed37-c7d0-7ddb-021769e39f54}">
+        <p14:section name="Bus" id="{82a32757-952e-6793-2347-2681aa56de6a}">
           <p14:sldIdLst>
             <p14:sldId id="260"/>
             <p14:sldId id="261"/>
@@ -146,14 +146,14 @@
             <p14:sldId id="263"/>
           </p14:sldIdLst>
         </p14:section>
-        <p14:section name="Buffer a tre stati" id="{ef9807f8-e4c5-e35f-bffb-031ff85c9bf6}">
+        <p14:section name="Buffer a tre stati" id="{ba1306c3-d683-1c01-2142-936f3aaf7908}">
           <p14:sldIdLst>
             <p14:sldId id="264"/>
             <p14:sldId id="265"/>
             <p14:sldId id="266"/>
           </p14:sldIdLst>
         </p14:section>
-        <p14:section name="Registri a scorrimento" id="{45c5127c-77f0-4cdb-7f7a-3f2ca9167bb9}">
+        <p14:section name="Registri a scorrimento" id="{cf77c030-fb21-f363-9a30-eb0e1b2ac1db}">
           <p14:sldIdLst>
             <p14:sldId id="267"/>
             <p14:sldId id="268"/>
@@ -162,7 +162,7 @@
             <p14:sldId id="271"/>
           </p14:sldIdLst>
         </p14:section>
-        <p14:section name="Ritorno alla macchina" id="{1e48fb8d-351b-ecca-bd71-c1edf60992fa}">
+        <p14:section name="Ritorno alla macchina" id="{3ca154f5-aa04-6c84-9c29-9d1e875e2b89}">
           <p14:sldIdLst>
             <p14:sldId id="272"/>
             <p14:sldId id="273"/>
@@ -577,6 +577,7 @@
               <a:t>La lezione precedente ha costruito un registro con i flip-flop. Questa si chiede come i registri comunicano: come una parola passa dall'uno all'altro, lungo quali fili, e che cosa accade quando molti registri condividono gli stessi fili. Le risposte sono il bus, il buffer three-state e il registro a scorrimento, le macchine elementari di ogni percorso dei dati. La battuta di Doc Brown in copertina è ironica in questo contesto: i dati hanno eccome bisogno di strade, e un bus è esattamente questo. Il riscaldamento parte da un fatto sul kit: il suo display riceve ogni pixel un bit alla volta.
 Stato di apprendimento: DA COMPRENDERE OGGI, alla fine di questa lezione lo spiegate, lo seguite passo passo e lo applicate da soli; DA UTILIZZARE OGGI, oggi seguite e usate la ricetta; come funziona dentro si spiega più avanti, o non fa parte del corso; DA COMPRENDERE PIÙ AVANTI, riconoscete il nome e lo scopo; lo spiega una lezione successiva. Una slide senza etichetta è contesto: una storia, un esempio, una domanda, un esercizio.
 Stato di apprendimento di questa lezione. DA COMPRENDERE OGGI: i registri a scorrimento; i registri come flip-flop; bus e porte three-state. DA UTILIZZARE OGGI: il programma completo, gli strumenti di PRG32 (si usa, non si studia, in questo corso). DA COMPRENDERE PIÙ AVANTI: l'I/O mappato in memoria (Lezione 15); memorie e indirizzi (Lezione 15). Una slide senza etichetta è contesto: una storia, un esempio, una domanda, un esercizio.
+Percorso. I risultati di oggi: (1) spiegare come i registri condividono un bus attraverso i buffer three-state; (2) usare un registro a scorrimento per il trasferimento seriale. Si appoggia su: i registri come flip-flop (Lezione 13). Prossimo passo: Lezione 15, La memoria.
 Per il docente: Spirale: il display del kit PRG32 riceve ogni pixel un bit alla volta; il riscaldamento invia un byte in serie in assembly, e la lezione costruisce le macchine che lo fanno in hardware.</a:t>
             </a:r>
             <a:endParaRPr lang="en-US" dirty="0"/>
@@ -1652,7 +1653,7 @@
             <a:r>
               <a:rPr lang="en-US" dirty="0"/>
               <a:t>Cinque conclusioni. Un registro è una forma di memoria con un modo di funzionamento elementare. I registri si leggono e si scrivono attraverso i bus. Un bus comune richiede circuiti a tre stati: 0, 1 e scollegato. I dati viaggiano in serie o in parallelo, e i registri a scorrimento convertono tra le due forme. E un decoder posto davanti a un gruppo di registri costituisce una memoria, che è l'argomento della prossima lezione.
-Stato di apprendimento, riepilogo. DA COMPRENDERE OGGI: i registri a scorrimento; i registri come flip-flop; bus e porte three-state. DA UTILIZZARE OGGI: il programma completo, gli strumenti di PRG32 (si usa, non si studia, in questo corso). DA COMPRENDERE PIÙ AVANTI: l'I/O mappato in memoria (Lezione 15); memorie e indirizzi (Lezione 15). Una slide senza etichetta è contesto: una storia, un esempio, una domanda, un esercizio.
+Stato di apprendimento, riepilogo. DA COMPRENDERE OGGI: i registri a scorrimento; i registri come flip-flop; bus e porte three-state. DA UTILIZZARE OGGI: il programma completo, gli strumenti di PRG32 (si usa, non si studia, in questo corso). DA COMPRENDERE PIÙ AVANTI: l'I/O mappato in memoria (Lezione 15); memorie e indirizzi (Lezione 15). Una slide senza etichetta è contesto: una storia, un esempio, una domanda, un esercizio. Il filo della lezione: Un bus è una strada che un solo registro alla volta può pilotare, e un registro a scorrimento trasforma una parola in una sequenza di bit: il display del kit riceve così i suoi pixel. Prossimo passo: la memoria. Biglietto d'uscita (da due a quattro minuti, da soli, su carta): 1. Tre registri condividono un bus comune. Che cosa succede se due di essi lo pilotano contemporaneamente, e quale componente lo impedisce? 2. Una parola di 8 bit viene inviata in serie, un bit per impulso di clock. Quanti impulsi servono, e che cosa fa il registro a scorrimento a ciascuno?
 Per il docente: Prossima lezione: la memoria.</a:t>
             </a:r>
             <a:endParaRPr lang="en-US" dirty="0"/>
